--- a/doc/操作手册.pptx
+++ b/doc/操作手册.pptx
@@ -3449,7 +3449,7 @@
         </p:nvSpPr>
         <p:spPr>
           <a:xfrm>
-            <a:off x="0" y="0"/>
+            <a:off x="16329" y="0"/>
             <a:ext cx="5290457" cy="892629"/>
           </a:xfrm>
         </p:spPr>
@@ -3458,10 +3458,94 @@
           <a:lstStyle/>
           <a:p>
             <a:r>
-              <a:rPr lang="en-US" altLang="zh-CN" dirty="0" smtClean="0"/>
-              <a:t>XXX</a:t>
+              <a:rPr lang="zh-TW" altLang="en-US" dirty="0"/>
+              <a:t>发布</a:t>
+            </a:r>
+            <a:r>
+              <a:rPr lang="zh-TW" altLang="en-US" dirty="0" smtClean="0"/>
+              <a:t>到</a:t>
+            </a:r>
+            <a:r>
+              <a:rPr lang="en-US" altLang="zh-TW" dirty="0" err="1" smtClean="0"/>
+              <a:t>vercel</a:t>
             </a:r>
             <a:endParaRPr lang="zh-CN" altLang="en-US" dirty="0"/>
+          </a:p>
+        </p:txBody>
+      </p:sp>
+      <p:pic>
+        <p:nvPicPr>
+          <p:cNvPr id="3" name="图片 2"/>
+          <p:cNvPicPr>
+            <a:picLocks noChangeAspect="1"/>
+          </p:cNvPicPr>
+          <p:nvPr/>
+        </p:nvPicPr>
+        <p:blipFill>
+          <a:blip r:embed="rId2"/>
+          <a:stretch>
+            <a:fillRect/>
+          </a:stretch>
+        </p:blipFill>
+        <p:spPr>
+          <a:xfrm>
+            <a:off x="87975" y="814322"/>
+            <a:ext cx="5868923" cy="4529766"/>
+          </a:xfrm>
+          <a:prstGeom prst="rect">
+            <a:avLst/>
+          </a:prstGeom>
+        </p:spPr>
+      </p:pic>
+      <p:pic>
+        <p:nvPicPr>
+          <p:cNvPr id="4" name="图片 3"/>
+          <p:cNvPicPr>
+            <a:picLocks noChangeAspect="1"/>
+          </p:cNvPicPr>
+          <p:nvPr/>
+        </p:nvPicPr>
+        <p:blipFill>
+          <a:blip r:embed="rId3"/>
+          <a:stretch>
+            <a:fillRect/>
+          </a:stretch>
+        </p:blipFill>
+        <p:spPr>
+          <a:xfrm>
+            <a:off x="6309297" y="2215243"/>
+            <a:ext cx="5558169" cy="2314290"/>
+          </a:xfrm>
+          <a:prstGeom prst="rect">
+            <a:avLst/>
+          </a:prstGeom>
+        </p:spPr>
+      </p:pic>
+      <p:sp>
+        <p:nvSpPr>
+          <p:cNvPr id="5" name="矩形 4"/>
+          <p:cNvSpPr/>
+          <p:nvPr/>
+        </p:nvSpPr>
+        <p:spPr>
+          <a:xfrm>
+            <a:off x="6230940" y="1606034"/>
+            <a:ext cx="3812262" cy="369332"/>
+          </a:xfrm>
+          <a:prstGeom prst="rect">
+            <a:avLst/>
+          </a:prstGeom>
+        </p:spPr>
+        <p:txBody>
+          <a:bodyPr wrap="none">
+            <a:spAutoFit/>
+          </a:bodyPr>
+          <a:lstStyle/>
+          <a:p>
+            <a:r>
+              <a:rPr lang="zh-CN" altLang="en-US" dirty="0"/>
+              <a:t>npx plugins add vercel/vercel-plugin</a:t>
+            </a:r>
           </a:p>
         </p:txBody>
       </p:sp>
@@ -3523,6 +3607,30 @@
           </a:p>
         </p:txBody>
       </p:sp>
+      <p:pic>
+        <p:nvPicPr>
+          <p:cNvPr id="3" name="图片 2"/>
+          <p:cNvPicPr>
+            <a:picLocks noChangeAspect="1"/>
+          </p:cNvPicPr>
+          <p:nvPr/>
+        </p:nvPicPr>
+        <p:blipFill>
+          <a:blip r:embed="rId2"/>
+          <a:stretch>
+            <a:fillRect/>
+          </a:stretch>
+        </p:blipFill>
+        <p:spPr>
+          <a:xfrm>
+            <a:off x="57990" y="936172"/>
+            <a:ext cx="10543632" cy="4180921"/>
+          </a:xfrm>
+          <a:prstGeom prst="rect">
+            <a:avLst/>
+          </a:prstGeom>
+        </p:spPr>
+      </p:pic>
     </p:spTree>
     <p:extLst>
       <p:ext uri="{BB962C8B-B14F-4D97-AF65-F5344CB8AC3E}">
@@ -3570,17 +3678,51 @@
           </a:xfrm>
         </p:spPr>
         <p:txBody>
-          <a:bodyPr/>
-          <a:lstStyle/>
-          <a:p>
-            <a:r>
-              <a:rPr lang="en-US" altLang="zh-CN" dirty="0" smtClean="0"/>
-              <a:t>XXX</a:t>
+          <a:bodyPr>
+            <a:normAutofit fontScale="90000"/>
+          </a:bodyPr>
+          <a:lstStyle/>
+          <a:p>
+            <a:r>
+              <a:rPr lang="zh-TW" altLang="en-US" dirty="0"/>
+              <a:t>改</a:t>
+            </a:r>
+            <a:r>
+              <a:rPr lang="zh-TW" altLang="en-US" dirty="0" smtClean="0"/>
+              <a:t>代码后更新到</a:t>
+            </a:r>
+            <a:r>
+              <a:rPr lang="en-US" altLang="zh-TW" dirty="0" err="1" smtClean="0"/>
+              <a:t>vercel</a:t>
             </a:r>
             <a:endParaRPr lang="zh-CN" altLang="en-US" dirty="0"/>
           </a:p>
         </p:txBody>
       </p:sp>
+      <p:pic>
+        <p:nvPicPr>
+          <p:cNvPr id="3" name="图片 2"/>
+          <p:cNvPicPr>
+            <a:picLocks noChangeAspect="1"/>
+          </p:cNvPicPr>
+          <p:nvPr/>
+        </p:nvPicPr>
+        <p:blipFill>
+          <a:blip r:embed="rId2"/>
+          <a:stretch>
+            <a:fillRect/>
+          </a:stretch>
+        </p:blipFill>
+        <p:spPr>
+          <a:xfrm>
+            <a:off x="233024" y="1307723"/>
+            <a:ext cx="5466667" cy="1238095"/>
+          </a:xfrm>
+          <a:prstGeom prst="rect">
+            <a:avLst/>
+          </a:prstGeom>
+        </p:spPr>
+      </p:pic>
     </p:spTree>
     <p:extLst>
       <p:ext uri="{BB962C8B-B14F-4D97-AF65-F5344CB8AC3E}">
@@ -5371,13 +5513,65 @@
           <a:lstStyle/>
           <a:p>
             <a:r>
-              <a:rPr lang="en-US" altLang="zh-CN" dirty="0" smtClean="0"/>
-              <a:t>XXX</a:t>
+              <a:rPr lang="zh-TW" altLang="en-US" dirty="0" smtClean="0"/>
+              <a:t>代码上传到</a:t>
+            </a:r>
+            <a:r>
+              <a:rPr lang="en-US" altLang="zh-TW" dirty="0" err="1" smtClean="0"/>
+              <a:t>github</a:t>
             </a:r>
             <a:endParaRPr lang="zh-CN" altLang="en-US" dirty="0"/>
           </a:p>
         </p:txBody>
       </p:sp>
+      <p:pic>
+        <p:nvPicPr>
+          <p:cNvPr id="3" name="图片 2"/>
+          <p:cNvPicPr>
+            <a:picLocks noChangeAspect="1"/>
+          </p:cNvPicPr>
+          <p:nvPr/>
+        </p:nvPicPr>
+        <p:blipFill>
+          <a:blip r:embed="rId2"/>
+          <a:stretch>
+            <a:fillRect/>
+          </a:stretch>
+        </p:blipFill>
+        <p:spPr>
+          <a:xfrm>
+            <a:off x="0" y="892629"/>
+            <a:ext cx="5552045" cy="5055905"/>
+          </a:xfrm>
+          <a:prstGeom prst="rect">
+            <a:avLst/>
+          </a:prstGeom>
+        </p:spPr>
+      </p:pic>
+      <p:pic>
+        <p:nvPicPr>
+          <p:cNvPr id="4" name="图片 3"/>
+          <p:cNvPicPr>
+            <a:picLocks noChangeAspect="1"/>
+          </p:cNvPicPr>
+          <p:nvPr/>
+        </p:nvPicPr>
+        <p:blipFill>
+          <a:blip r:embed="rId3"/>
+          <a:stretch>
+            <a:fillRect/>
+          </a:stretch>
+        </p:blipFill>
+        <p:spPr>
+          <a:xfrm>
+            <a:off x="5390209" y="1545787"/>
+            <a:ext cx="5043147" cy="4402747"/>
+          </a:xfrm>
+          <a:prstGeom prst="rect">
+            <a:avLst/>
+          </a:prstGeom>
+        </p:spPr>
+      </p:pic>
     </p:spTree>
     <p:extLst>
       <p:ext uri="{BB962C8B-B14F-4D97-AF65-F5344CB8AC3E}">
@@ -5429,8 +5623,152 @@
           <a:lstStyle/>
           <a:p>
             <a:r>
-              <a:rPr lang="en-US" altLang="zh-CN" dirty="0" smtClean="0"/>
-              <a:t>XXX</a:t>
+              <a:rPr lang="zh-CN" altLang="en-US" dirty="0"/>
+              <a:t>代码上传到</a:t>
+            </a:r>
+            <a:r>
+              <a:rPr lang="en-US" altLang="zh-CN" dirty="0" err="1"/>
+              <a:t>github</a:t>
+            </a:r>
+            <a:endParaRPr lang="zh-CN" altLang="en-US" dirty="0"/>
+          </a:p>
+        </p:txBody>
+      </p:sp>
+      <p:pic>
+        <p:nvPicPr>
+          <p:cNvPr id="3" name="图片 2"/>
+          <p:cNvPicPr>
+            <a:picLocks noChangeAspect="1"/>
+          </p:cNvPicPr>
+          <p:nvPr/>
+        </p:nvPicPr>
+        <p:blipFill>
+          <a:blip r:embed="rId2"/>
+          <a:stretch>
+            <a:fillRect/>
+          </a:stretch>
+        </p:blipFill>
+        <p:spPr>
+          <a:xfrm>
+            <a:off x="0" y="957942"/>
+            <a:ext cx="5586934" cy="3799115"/>
+          </a:xfrm>
+          <a:prstGeom prst="rect">
+            <a:avLst/>
+          </a:prstGeom>
+        </p:spPr>
+      </p:pic>
+      <p:pic>
+        <p:nvPicPr>
+          <p:cNvPr id="4" name="图片 3"/>
+          <p:cNvPicPr>
+            <a:picLocks noChangeAspect="1"/>
+          </p:cNvPicPr>
+          <p:nvPr/>
+        </p:nvPicPr>
+        <p:blipFill>
+          <a:blip r:embed="rId3"/>
+          <a:stretch>
+            <a:fillRect/>
+          </a:stretch>
+        </p:blipFill>
+        <p:spPr>
+          <a:xfrm>
+            <a:off x="4880800" y="2661557"/>
+            <a:ext cx="7178685" cy="4053271"/>
+          </a:xfrm>
+          <a:prstGeom prst="rect">
+            <a:avLst/>
+          </a:prstGeom>
+        </p:spPr>
+      </p:pic>
+      <p:sp>
+        <p:nvSpPr>
+          <p:cNvPr id="5" name="圆角矩形 4"/>
+          <p:cNvSpPr/>
+          <p:nvPr/>
+        </p:nvSpPr>
+        <p:spPr>
+          <a:xfrm>
+            <a:off x="6389914" y="375557"/>
+            <a:ext cx="4561115" cy="2122714"/>
+          </a:xfrm>
+          <a:prstGeom prst="roundRect">
+            <a:avLst/>
+          </a:prstGeom>
+        </p:spPr>
+        <p:style>
+          <a:lnRef idx="2">
+            <a:schemeClr val="accent2">
+              <a:shade val="50000"/>
+            </a:schemeClr>
+          </a:lnRef>
+          <a:fillRef idx="1">
+            <a:schemeClr val="accent2"/>
+          </a:fillRef>
+          <a:effectRef idx="0">
+            <a:schemeClr val="accent2"/>
+          </a:effectRef>
+          <a:fontRef idx="minor">
+            <a:schemeClr val="lt1"/>
+          </a:fontRef>
+        </p:style>
+        <p:txBody>
+          <a:bodyPr rtlCol="0" anchor="ctr"/>
+          <a:lstStyle/>
+          <a:p>
+            <a:pPr algn="ctr"/>
+            <a:r>
+              <a:rPr lang="en-US" altLang="zh-TW" dirty="0" err="1" smtClean="0"/>
+              <a:t>Vpn</a:t>
+            </a:r>
+            <a:r>
+              <a:rPr lang="zh-TW" altLang="en-US" dirty="0" smtClean="0"/>
+              <a:t>＋</a:t>
+            </a:r>
+            <a:r>
+              <a:rPr lang="en-US" altLang="zh-TW" dirty="0" err="1" smtClean="0"/>
+              <a:t>deepseek</a:t>
+            </a:r>
+            <a:r>
+              <a:rPr lang="zh-TW" altLang="en-US" dirty="0" smtClean="0"/>
+              <a:t>结果失败，说是</a:t>
+            </a:r>
+            <a:r>
+              <a:rPr lang="en-US" altLang="zh-TW" dirty="0" err="1" smtClean="0"/>
+              <a:t>deepseek</a:t>
+            </a:r>
+            <a:r>
+              <a:rPr lang="zh-TW" altLang="en-US" dirty="0" smtClean="0"/>
+              <a:t>不支持。</a:t>
+            </a:r>
+            <a:endParaRPr lang="en-US" altLang="zh-TW" dirty="0" smtClean="0"/>
+          </a:p>
+          <a:p>
+            <a:pPr algn="ctr"/>
+            <a:r>
+              <a:rPr lang="zh-TW" altLang="en-US" dirty="0"/>
+              <a:t>改</a:t>
+            </a:r>
+            <a:r>
+              <a:rPr lang="zh-TW" altLang="en-US" dirty="0" smtClean="0"/>
+              <a:t>成</a:t>
+            </a:r>
+            <a:r>
+              <a:rPr lang="en-US" altLang="zh-TW" dirty="0" smtClean="0"/>
+              <a:t>sam_auto_5G+</a:t>
+            </a:r>
+            <a:r>
+              <a:rPr lang="zh-TW" altLang="en-US" dirty="0" smtClean="0"/>
+              <a:t>中继</a:t>
+            </a:r>
+            <a:r>
+              <a:rPr lang="en-US" altLang="zh-TW" dirty="0" smtClean="0"/>
+              <a:t>model</a:t>
+            </a:r>
+            <a:r>
+              <a:rPr lang="zh-TW" altLang="en-US" dirty="0" smtClean="0"/>
+              <a:t>成功！！</a:t>
             </a:r>
             <a:endParaRPr lang="zh-CN" altLang="en-US" dirty="0"/>
           </a:p>

--- a/doc/操作手册.pptx
+++ b/doc/操作手册.pptx
@@ -3723,6 +3723,58 @@
           </a:prstGeom>
         </p:spPr>
       </p:pic>
+      <p:pic>
+        <p:nvPicPr>
+          <p:cNvPr id="4" name="图片 3"/>
+          <p:cNvPicPr>
+            <a:picLocks noChangeAspect="1"/>
+          </p:cNvPicPr>
+          <p:nvPr/>
+        </p:nvPicPr>
+        <p:blipFill>
+          <a:blip r:embed="rId3"/>
+          <a:stretch>
+            <a:fillRect/>
+          </a:stretch>
+        </p:blipFill>
+        <p:spPr>
+          <a:xfrm>
+            <a:off x="233024" y="2775857"/>
+            <a:ext cx="6490950" cy="1446290"/>
+          </a:xfrm>
+          <a:prstGeom prst="rect">
+            <a:avLst/>
+          </a:prstGeom>
+        </p:spPr>
+      </p:pic>
+      <p:sp>
+        <p:nvSpPr>
+          <p:cNvPr id="5" name="矩形 4"/>
+          <p:cNvSpPr/>
+          <p:nvPr/>
+        </p:nvSpPr>
+        <p:spPr>
+          <a:xfrm>
+            <a:off x="140494" y="4918306"/>
+            <a:ext cx="9727405" cy="369332"/>
+          </a:xfrm>
+          <a:prstGeom prst="rect">
+            <a:avLst/>
+          </a:prstGeom>
+        </p:spPr>
+        <p:txBody>
+          <a:bodyPr wrap="square">
+            <a:spAutoFit/>
+          </a:bodyPr>
+          <a:lstStyle/>
+          <a:p>
+            <a:r>
+              <a:rPr lang="zh-CN" altLang="en-US" dirty="0"/>
+              <a:t> git add -A &amp;&amp; git commit -m "feat: 更新说明" &amp;&amp; git push origin main</a:t>
+            </a:r>
+          </a:p>
+        </p:txBody>
+      </p:sp>
     </p:spTree>
     <p:extLst>
       <p:ext uri="{BB962C8B-B14F-4D97-AF65-F5344CB8AC3E}">
@@ -3781,6 +3833,30 @@
           </a:p>
         </p:txBody>
       </p:sp>
+      <p:pic>
+        <p:nvPicPr>
+          <p:cNvPr id="3" name="图片 2"/>
+          <p:cNvPicPr>
+            <a:picLocks noChangeAspect="1"/>
+          </p:cNvPicPr>
+          <p:nvPr/>
+        </p:nvPicPr>
+        <p:blipFill>
+          <a:blip r:embed="rId2"/>
+          <a:stretch>
+            <a:fillRect/>
+          </a:stretch>
+        </p:blipFill>
+        <p:spPr>
+          <a:xfrm>
+            <a:off x="1652582" y="3170493"/>
+            <a:ext cx="7001561" cy="3228635"/>
+          </a:xfrm>
+          <a:prstGeom prst="rect">
+            <a:avLst/>
+          </a:prstGeom>
+        </p:spPr>
+      </p:pic>
     </p:spTree>
     <p:extLst>
       <p:ext uri="{BB962C8B-B14F-4D97-AF65-F5344CB8AC3E}">

--- a/doc/操作手册.pptx
+++ b/doc/操作手册.pptx
@@ -11,25 +11,19 @@
     <p:sldId id="275" r:id="rId5"/>
     <p:sldId id="276" r:id="rId6"/>
     <p:sldId id="277" r:id="rId7"/>
-    <p:sldId id="278" r:id="rId8"/>
-    <p:sldId id="279" r:id="rId9"/>
-    <p:sldId id="280" r:id="rId10"/>
-    <p:sldId id="281" r:id="rId11"/>
-    <p:sldId id="282" r:id="rId12"/>
-    <p:sldId id="283" r:id="rId13"/>
-    <p:sldId id="284" r:id="rId14"/>
-    <p:sldId id="285" r:id="rId15"/>
-    <p:sldId id="286" r:id="rId16"/>
-    <p:sldId id="287" r:id="rId17"/>
-    <p:sldId id="288" r:id="rId18"/>
-    <p:sldId id="289" r:id="rId19"/>
-    <p:sldId id="290" r:id="rId20"/>
-    <p:sldId id="291" r:id="rId21"/>
-    <p:sldId id="292" r:id="rId22"/>
-    <p:sldId id="293" r:id="rId23"/>
-    <p:sldId id="294" r:id="rId24"/>
-    <p:sldId id="295" r:id="rId25"/>
-    <p:sldId id="296" r:id="rId26"/>
+    <p:sldId id="301" r:id="rId8"/>
+    <p:sldId id="278" r:id="rId9"/>
+    <p:sldId id="279" r:id="rId10"/>
+    <p:sldId id="280" r:id="rId11"/>
+    <p:sldId id="300" r:id="rId12"/>
+    <p:sldId id="281" r:id="rId13"/>
+    <p:sldId id="282" r:id="rId14"/>
+    <p:sldId id="283" r:id="rId15"/>
+    <p:sldId id="285" r:id="rId16"/>
+    <p:sldId id="286" r:id="rId17"/>
+    <p:sldId id="297" r:id="rId18"/>
+    <p:sldId id="298" r:id="rId19"/>
+    <p:sldId id="299" r:id="rId20"/>
   </p:sldIdLst>
   <p:sldSz cx="12192000" cy="6858000"/>
   <p:notesSz cx="6858000" cy="9144000"/>
@@ -267,7 +261,7 @@
           <a:p>
             <a:fld id="{98F033AC-D644-4084-BE46-2A181D0F8731}" type="datetimeFigureOut">
               <a:rPr lang="zh-CN" altLang="en-US" smtClean="0"/>
-              <a:t>2026/7/15</a:t>
+              <a:t>2026/7/16</a:t>
             </a:fld>
             <a:endParaRPr lang="zh-CN" altLang="en-US"/>
           </a:p>
@@ -437,7 +431,7 @@
           <a:p>
             <a:fld id="{98F033AC-D644-4084-BE46-2A181D0F8731}" type="datetimeFigureOut">
               <a:rPr lang="zh-CN" altLang="en-US" smtClean="0"/>
-              <a:t>2026/7/15</a:t>
+              <a:t>2026/7/16</a:t>
             </a:fld>
             <a:endParaRPr lang="zh-CN" altLang="en-US"/>
           </a:p>
@@ -617,7 +611,7 @@
           <a:p>
             <a:fld id="{98F033AC-D644-4084-BE46-2A181D0F8731}" type="datetimeFigureOut">
               <a:rPr lang="zh-CN" altLang="en-US" smtClean="0"/>
-              <a:t>2026/7/15</a:t>
+              <a:t>2026/7/16</a:t>
             </a:fld>
             <a:endParaRPr lang="zh-CN" altLang="en-US"/>
           </a:p>
@@ -787,7 +781,7 @@
           <a:p>
             <a:fld id="{98F033AC-D644-4084-BE46-2A181D0F8731}" type="datetimeFigureOut">
               <a:rPr lang="zh-CN" altLang="en-US" smtClean="0"/>
-              <a:t>2026/7/15</a:t>
+              <a:t>2026/7/16</a:t>
             </a:fld>
             <a:endParaRPr lang="zh-CN" altLang="en-US"/>
           </a:p>
@@ -1033,7 +1027,7 @@
           <a:p>
             <a:fld id="{98F033AC-D644-4084-BE46-2A181D0F8731}" type="datetimeFigureOut">
               <a:rPr lang="zh-CN" altLang="en-US" smtClean="0"/>
-              <a:t>2026/7/15</a:t>
+              <a:t>2026/7/16</a:t>
             </a:fld>
             <a:endParaRPr lang="zh-CN" altLang="en-US"/>
           </a:p>
@@ -1265,7 +1259,7 @@
           <a:p>
             <a:fld id="{98F033AC-D644-4084-BE46-2A181D0F8731}" type="datetimeFigureOut">
               <a:rPr lang="zh-CN" altLang="en-US" smtClean="0"/>
-              <a:t>2026/7/15</a:t>
+              <a:t>2026/7/16</a:t>
             </a:fld>
             <a:endParaRPr lang="zh-CN" altLang="en-US"/>
           </a:p>
@@ -1632,7 +1626,7 @@
           <a:p>
             <a:fld id="{98F033AC-D644-4084-BE46-2A181D0F8731}" type="datetimeFigureOut">
               <a:rPr lang="zh-CN" altLang="en-US" smtClean="0"/>
-              <a:t>2026/7/15</a:t>
+              <a:t>2026/7/16</a:t>
             </a:fld>
             <a:endParaRPr lang="zh-CN" altLang="en-US"/>
           </a:p>
@@ -1750,7 +1744,7 @@
           <a:p>
             <a:fld id="{98F033AC-D644-4084-BE46-2A181D0F8731}" type="datetimeFigureOut">
               <a:rPr lang="zh-CN" altLang="en-US" smtClean="0"/>
-              <a:t>2026/7/15</a:t>
+              <a:t>2026/7/16</a:t>
             </a:fld>
             <a:endParaRPr lang="zh-CN" altLang="en-US"/>
           </a:p>
@@ -1845,7 +1839,7 @@
           <a:p>
             <a:fld id="{98F033AC-D644-4084-BE46-2A181D0F8731}" type="datetimeFigureOut">
               <a:rPr lang="zh-CN" altLang="en-US" smtClean="0"/>
-              <a:t>2026/7/15</a:t>
+              <a:t>2026/7/16</a:t>
             </a:fld>
             <a:endParaRPr lang="zh-CN" altLang="en-US"/>
           </a:p>
@@ -2122,7 +2116,7 @@
           <a:p>
             <a:fld id="{98F033AC-D644-4084-BE46-2A181D0F8731}" type="datetimeFigureOut">
               <a:rPr lang="zh-CN" altLang="en-US" smtClean="0"/>
-              <a:t>2026/7/15</a:t>
+              <a:t>2026/7/16</a:t>
             </a:fld>
             <a:endParaRPr lang="zh-CN" altLang="en-US"/>
           </a:p>
@@ -2375,7 +2369,7 @@
           <a:p>
             <a:fld id="{98F033AC-D644-4084-BE46-2A181D0F8731}" type="datetimeFigureOut">
               <a:rPr lang="zh-CN" altLang="en-US" smtClean="0"/>
-              <a:t>2026/7/15</a:t>
+              <a:t>2026/7/16</a:t>
             </a:fld>
             <a:endParaRPr lang="zh-CN" altLang="en-US"/>
           </a:p>
@@ -2588,7 +2582,7 @@
           <a:p>
             <a:fld id="{98F033AC-D644-4084-BE46-2A181D0F8731}" type="datetimeFigureOut">
               <a:rPr lang="zh-CN" altLang="en-US" smtClean="0"/>
-              <a:t>2026/7/15</a:t>
+              <a:t>2026/7/16</a:t>
             </a:fld>
             <a:endParaRPr lang="zh-CN" altLang="en-US"/>
           </a:p>
@@ -3051,15 +3045,7 @@
           <a:p>
             <a:r>
               <a:rPr lang="zh-TW" altLang="en-US" dirty="0" smtClean="0"/>
-              <a:t>本项目系统名称是</a:t>
-            </a:r>
-            <a:r>
-              <a:rPr lang="zh-TW" altLang="en-US" dirty="0" smtClean="0"/>
-              <a:t>：</a:t>
-            </a:r>
-            <a:r>
-              <a:rPr lang="zh-TW" altLang="en-US" dirty="0" smtClean="0"/>
-              <a:t>开发一个</a:t>
+              <a:t>本项目系统名称是：开发一个</a:t>
             </a:r>
             <a:r>
               <a:rPr lang="en-US" altLang="zh-TW" dirty="0" err="1" smtClean="0"/>
@@ -3305,11 +3291,7 @@
             <a:pPr lvl="1"/>
             <a:r>
               <a:rPr lang="zh-CN" altLang="en-US" dirty="0" smtClean="0"/>
-              <a:t>数据库</a:t>
-            </a:r>
-            <a:r>
-              <a:rPr lang="zh-CN" altLang="en-US" dirty="0" smtClean="0"/>
-              <a:t>：</a:t>
+              <a:t>数据库：</a:t>
             </a:r>
             <a:r>
               <a:rPr lang="en-US" altLang="zh-CN" dirty="0" err="1" smtClean="0"/>
@@ -3364,17 +3346,12 @@
               <a:rPr lang="en-US" altLang="zh-CN" dirty="0" smtClean="0"/>
               <a:t>sb_publishable_OBCby9Ptzrihrrto1iHsAA_KuTniWkh</a:t>
             </a:r>
-            <a:endParaRPr lang="en-US" altLang="zh-CN" dirty="0" smtClean="0"/>
           </a:p>
           <a:p>
             <a:pPr lvl="1"/>
             <a:r>
               <a:rPr lang="zh-CN" altLang="en-US" dirty="0" smtClean="0"/>
-              <a:t>禁止</a:t>
-            </a:r>
-            <a:r>
-              <a:rPr lang="zh-CN" altLang="en-US" dirty="0" smtClean="0"/>
-              <a:t>使用 </a:t>
+              <a:t>禁止使用 </a:t>
             </a:r>
             <a:r>
               <a:rPr lang="en-US" altLang="zh-CN" dirty="0" err="1" smtClean="0"/>
@@ -3421,6 +3398,278 @@
 </file>
 
 <file path=ppt/slides/slide10.xml><?xml version="1.0" encoding="utf-8"?>
+<p:sld xmlns:a="http://schemas.openxmlformats.org/drawingml/2006/main" xmlns:r="http://schemas.openxmlformats.org/officeDocument/2006/relationships" xmlns:p="http://schemas.openxmlformats.org/presentationml/2006/main">
+  <p:cSld>
+    <p:spTree>
+      <p:nvGrpSpPr>
+        <p:cNvPr id="1" name=""/>
+        <p:cNvGrpSpPr/>
+        <p:nvPr/>
+      </p:nvGrpSpPr>
+      <p:grpSpPr>
+        <a:xfrm>
+          <a:off x="0" y="0"/>
+          <a:ext cx="0" cy="0"/>
+          <a:chOff x="0" y="0"/>
+          <a:chExt cx="0" cy="0"/>
+        </a:xfrm>
+      </p:grpSpPr>
+      <p:sp>
+        <p:nvSpPr>
+          <p:cNvPr id="2" name="标题 1"/>
+          <p:cNvSpPr>
+            <a:spLocks noGrp="1"/>
+          </p:cNvSpPr>
+          <p:nvPr>
+            <p:ph type="title"/>
+          </p:nvPr>
+        </p:nvSpPr>
+        <p:spPr>
+          <a:xfrm>
+            <a:off x="0" y="0"/>
+            <a:ext cx="5290457" cy="892629"/>
+          </a:xfrm>
+        </p:spPr>
+        <p:txBody>
+          <a:bodyPr/>
+          <a:lstStyle/>
+          <a:p>
+            <a:r>
+              <a:rPr lang="zh-CN" altLang="en-US" dirty="0"/>
+              <a:t>代码上传到</a:t>
+            </a:r>
+            <a:r>
+              <a:rPr lang="en-US" altLang="zh-CN" dirty="0" err="1"/>
+              <a:t>github</a:t>
+            </a:r>
+            <a:endParaRPr lang="zh-CN" altLang="en-US" dirty="0"/>
+          </a:p>
+        </p:txBody>
+      </p:sp>
+      <p:pic>
+        <p:nvPicPr>
+          <p:cNvPr id="3" name="图片 2"/>
+          <p:cNvPicPr>
+            <a:picLocks noChangeAspect="1"/>
+          </p:cNvPicPr>
+          <p:nvPr/>
+        </p:nvPicPr>
+        <p:blipFill>
+          <a:blip r:embed="rId2"/>
+          <a:stretch>
+            <a:fillRect/>
+          </a:stretch>
+        </p:blipFill>
+        <p:spPr>
+          <a:xfrm>
+            <a:off x="0" y="957942"/>
+            <a:ext cx="5586934" cy="3799115"/>
+          </a:xfrm>
+          <a:prstGeom prst="rect">
+            <a:avLst/>
+          </a:prstGeom>
+        </p:spPr>
+      </p:pic>
+      <p:pic>
+        <p:nvPicPr>
+          <p:cNvPr id="4" name="图片 3"/>
+          <p:cNvPicPr>
+            <a:picLocks noChangeAspect="1"/>
+          </p:cNvPicPr>
+          <p:nvPr/>
+        </p:nvPicPr>
+        <p:blipFill>
+          <a:blip r:embed="rId3"/>
+          <a:stretch>
+            <a:fillRect/>
+          </a:stretch>
+        </p:blipFill>
+        <p:spPr>
+          <a:xfrm>
+            <a:off x="6374963" y="3505200"/>
+            <a:ext cx="5684522" cy="3209628"/>
+          </a:xfrm>
+          <a:prstGeom prst="rect">
+            <a:avLst/>
+          </a:prstGeom>
+        </p:spPr>
+      </p:pic>
+      <p:sp>
+        <p:nvSpPr>
+          <p:cNvPr id="5" name="圆角矩形 4"/>
+          <p:cNvSpPr/>
+          <p:nvPr/>
+        </p:nvSpPr>
+        <p:spPr>
+          <a:xfrm>
+            <a:off x="6389914" y="375557"/>
+            <a:ext cx="4561115" cy="2122714"/>
+          </a:xfrm>
+          <a:prstGeom prst="roundRect">
+            <a:avLst/>
+          </a:prstGeom>
+        </p:spPr>
+        <p:style>
+          <a:lnRef idx="2">
+            <a:schemeClr val="accent2">
+              <a:shade val="50000"/>
+            </a:schemeClr>
+          </a:lnRef>
+          <a:fillRef idx="1">
+            <a:schemeClr val="accent2"/>
+          </a:fillRef>
+          <a:effectRef idx="0">
+            <a:schemeClr val="accent2"/>
+          </a:effectRef>
+          <a:fontRef idx="minor">
+            <a:schemeClr val="lt1"/>
+          </a:fontRef>
+        </p:style>
+        <p:txBody>
+          <a:bodyPr rtlCol="0" anchor="ctr"/>
+          <a:lstStyle/>
+          <a:p>
+            <a:pPr algn="ctr"/>
+            <a:r>
+              <a:rPr lang="en-US" altLang="zh-TW" dirty="0" err="1" smtClean="0"/>
+              <a:t>Vpn</a:t>
+            </a:r>
+            <a:r>
+              <a:rPr lang="zh-TW" altLang="en-US" dirty="0" smtClean="0"/>
+              <a:t>＋</a:t>
+            </a:r>
+            <a:r>
+              <a:rPr lang="en-US" altLang="zh-TW" dirty="0" err="1" smtClean="0"/>
+              <a:t>deepseek</a:t>
+            </a:r>
+            <a:r>
+              <a:rPr lang="zh-TW" altLang="en-US" dirty="0" smtClean="0"/>
+              <a:t>结果失败，说是</a:t>
+            </a:r>
+            <a:r>
+              <a:rPr lang="en-US" altLang="zh-TW" dirty="0" err="1" smtClean="0"/>
+              <a:t>deepseek</a:t>
+            </a:r>
+            <a:r>
+              <a:rPr lang="zh-TW" altLang="en-US" dirty="0" smtClean="0"/>
+              <a:t>不支持。</a:t>
+            </a:r>
+            <a:endParaRPr lang="en-US" altLang="zh-TW" dirty="0" smtClean="0"/>
+          </a:p>
+          <a:p>
+            <a:pPr algn="ctr"/>
+            <a:r>
+              <a:rPr lang="zh-TW" altLang="en-US" dirty="0"/>
+              <a:t>改</a:t>
+            </a:r>
+            <a:r>
+              <a:rPr lang="zh-TW" altLang="en-US" dirty="0" smtClean="0"/>
+              <a:t>成</a:t>
+            </a:r>
+            <a:r>
+              <a:rPr lang="en-US" altLang="zh-TW" dirty="0" smtClean="0"/>
+              <a:t>sam_auto_5G+</a:t>
+            </a:r>
+            <a:r>
+              <a:rPr lang="zh-TW" altLang="en-US" dirty="0" smtClean="0"/>
+              <a:t>中继</a:t>
+            </a:r>
+            <a:r>
+              <a:rPr lang="en-US" altLang="zh-TW" dirty="0" smtClean="0"/>
+              <a:t>model</a:t>
+            </a:r>
+            <a:r>
+              <a:rPr lang="zh-TW" altLang="en-US" dirty="0" smtClean="0"/>
+              <a:t>成功！</a:t>
+            </a:r>
+            <a:endParaRPr lang="en-US" altLang="zh-TW" dirty="0" smtClean="0"/>
+          </a:p>
+          <a:p>
+            <a:pPr algn="ctr"/>
+            <a:r>
+              <a:rPr lang="zh-TW" altLang="en-US" dirty="0" smtClean="0"/>
+              <a:t>直接下指令应该更快！！</a:t>
+            </a:r>
+            <a:endParaRPr lang="zh-CN" altLang="en-US" dirty="0"/>
+          </a:p>
+        </p:txBody>
+      </p:sp>
+    </p:spTree>
+    <p:extLst>
+      <p:ext uri="{BB962C8B-B14F-4D97-AF65-F5344CB8AC3E}">
+        <p14:creationId xmlns:p14="http://schemas.microsoft.com/office/powerpoint/2010/main" val="2654713184"/>
+      </p:ext>
+    </p:extLst>
+  </p:cSld>
+  <p:clrMapOvr>
+    <a:masterClrMapping/>
+  </p:clrMapOvr>
+</p:sld>
+</file>
+
+<file path=ppt/slides/slide11.xml><?xml version="1.0" encoding="utf-8"?>
+<p:sld xmlns:a="http://schemas.openxmlformats.org/drawingml/2006/main" xmlns:r="http://schemas.openxmlformats.org/officeDocument/2006/relationships" xmlns:p="http://schemas.openxmlformats.org/presentationml/2006/main">
+  <p:cSld>
+    <p:spTree>
+      <p:nvGrpSpPr>
+        <p:cNvPr id="1" name=""/>
+        <p:cNvGrpSpPr/>
+        <p:nvPr/>
+      </p:nvGrpSpPr>
+      <p:grpSpPr>
+        <a:xfrm>
+          <a:off x="0" y="0"/>
+          <a:ext cx="0" cy="0"/>
+          <a:chOff x="0" y="0"/>
+          <a:chExt cx="0" cy="0"/>
+        </a:xfrm>
+      </p:grpSpPr>
+      <p:sp>
+        <p:nvSpPr>
+          <p:cNvPr id="2" name="标题 1"/>
+          <p:cNvSpPr>
+            <a:spLocks noGrp="1"/>
+          </p:cNvSpPr>
+          <p:nvPr>
+            <p:ph type="title"/>
+          </p:nvPr>
+        </p:nvSpPr>
+        <p:spPr>
+          <a:xfrm>
+            <a:off x="3302908" y="702810"/>
+            <a:ext cx="5759450" cy="2852737"/>
+          </a:xfrm>
+        </p:spPr>
+        <p:txBody>
+          <a:bodyPr/>
+          <a:lstStyle/>
+          <a:p>
+            <a:r>
+              <a:rPr lang="zh-TW" altLang="en-US" dirty="0"/>
+              <a:t>发布到</a:t>
+            </a:r>
+            <a:r>
+              <a:rPr lang="en-US" altLang="zh-TW" dirty="0" err="1"/>
+              <a:t>vercel</a:t>
+            </a:r>
+            <a:endParaRPr lang="zh-CN" altLang="en-US" dirty="0"/>
+          </a:p>
+        </p:txBody>
+      </p:sp>
+    </p:spTree>
+    <p:extLst>
+      <p:ext uri="{BB962C8B-B14F-4D97-AF65-F5344CB8AC3E}">
+        <p14:creationId xmlns:p14="http://schemas.microsoft.com/office/powerpoint/2010/main" val="1381854963"/>
+      </p:ext>
+    </p:extLst>
+  </p:cSld>
+  <p:clrMapOvr>
+    <a:masterClrMapping/>
+  </p:clrMapOvr>
+</p:sld>
+</file>
+
+<file path=ppt/slides/slide12.xml><?xml version="1.0" encoding="utf-8"?>
 <p:sld xmlns:a="http://schemas.openxmlformats.org/drawingml/2006/main" xmlns:r="http://schemas.openxmlformats.org/officeDocument/2006/relationships" xmlns:p="http://schemas.openxmlformats.org/presentationml/2006/main">
   <p:cSld>
     <p:spTree>
@@ -3562,7 +3811,7 @@
 </p:sld>
 </file>
 
-<file path=ppt/slides/slide11.xml><?xml version="1.0" encoding="utf-8"?>
+<file path=ppt/slides/slide13.xml><?xml version="1.0" encoding="utf-8"?>
 <p:sld xmlns:a="http://schemas.openxmlformats.org/drawingml/2006/main" xmlns:r="http://schemas.openxmlformats.org/officeDocument/2006/relationships" xmlns:p="http://schemas.openxmlformats.org/presentationml/2006/main">
   <p:cSld>
     <p:spTree>
@@ -3644,7 +3893,7 @@
 </p:sld>
 </file>
 
-<file path=ppt/slides/slide12.xml><?xml version="1.0" encoding="utf-8"?>
+<file path=ppt/slides/slide14.xml><?xml version="1.0" encoding="utf-8"?>
 <p:sld xmlns:a="http://schemas.openxmlformats.org/drawingml/2006/main" xmlns:r="http://schemas.openxmlformats.org/officeDocument/2006/relationships" xmlns:p="http://schemas.openxmlformats.org/presentationml/2006/main">
   <p:cSld>
     <p:spTree>
@@ -3755,7 +4004,7 @@
         </p:nvSpPr>
         <p:spPr>
           <a:xfrm>
-            <a:off x="140494" y="4918306"/>
+            <a:off x="151380" y="5691192"/>
             <a:ext cx="9727405" cy="369332"/>
           </a:xfrm>
           <a:prstGeom prst="rect">
@@ -3775,82 +4024,24 @@
           </a:p>
         </p:txBody>
       </p:sp>
-    </p:spTree>
-    <p:extLst>
-      <p:ext uri="{BB962C8B-B14F-4D97-AF65-F5344CB8AC3E}">
-        <p14:creationId xmlns:p14="http://schemas.microsoft.com/office/powerpoint/2010/main" val="2273202581"/>
-      </p:ext>
-    </p:extLst>
-  </p:cSld>
-  <p:clrMapOvr>
-    <a:masterClrMapping/>
-  </p:clrMapOvr>
-</p:sld>
-</file>
-
-<file path=ppt/slides/slide13.xml><?xml version="1.0" encoding="utf-8"?>
-<p:sld xmlns:a="http://schemas.openxmlformats.org/drawingml/2006/main" xmlns:r="http://schemas.openxmlformats.org/officeDocument/2006/relationships" xmlns:p="http://schemas.openxmlformats.org/presentationml/2006/main">
-  <p:cSld>
-    <p:spTree>
-      <p:nvGrpSpPr>
-        <p:cNvPr id="1" name=""/>
-        <p:cNvGrpSpPr/>
-        <p:nvPr/>
-      </p:nvGrpSpPr>
-      <p:grpSpPr>
-        <a:xfrm>
-          <a:off x="0" y="0"/>
-          <a:ext cx="0" cy="0"/>
-          <a:chOff x="0" y="0"/>
-          <a:chExt cx="0" cy="0"/>
-        </a:xfrm>
-      </p:grpSpPr>
-      <p:sp>
-        <p:nvSpPr>
-          <p:cNvPr id="2" name="标题 1"/>
-          <p:cNvSpPr>
-            <a:spLocks noGrp="1"/>
-          </p:cNvSpPr>
-          <p:nvPr>
-            <p:ph type="title"/>
-          </p:nvPr>
-        </p:nvSpPr>
-        <p:spPr>
-          <a:xfrm>
-            <a:off x="0" y="0"/>
-            <a:ext cx="5290457" cy="892629"/>
-          </a:xfrm>
-        </p:spPr>
-        <p:txBody>
-          <a:bodyPr/>
-          <a:lstStyle/>
-          <a:p>
-            <a:r>
-              <a:rPr lang="en-US" altLang="zh-CN" dirty="0" smtClean="0"/>
-              <a:t>XXX</a:t>
-            </a:r>
-            <a:endParaRPr lang="zh-CN" altLang="en-US" dirty="0"/>
-          </a:p>
-        </p:txBody>
-      </p:sp>
       <p:pic>
         <p:nvPicPr>
-          <p:cNvPr id="3" name="图片 2"/>
+          <p:cNvPr id="6" name="图片 5"/>
           <p:cNvPicPr>
             <a:picLocks noChangeAspect="1"/>
           </p:cNvPicPr>
           <p:nvPr/>
         </p:nvPicPr>
         <p:blipFill>
-          <a:blip r:embed="rId2"/>
+          <a:blip r:embed="rId4"/>
           <a:stretch>
             <a:fillRect/>
           </a:stretch>
         </p:blipFill>
         <p:spPr>
           <a:xfrm>
-            <a:off x="1652582" y="3170493"/>
-            <a:ext cx="7001561" cy="3228635"/>
+            <a:off x="233024" y="4821340"/>
+            <a:ext cx="11904547" cy="852461"/>
           </a:xfrm>
           <a:prstGeom prst="rect">
             <a:avLst/>
@@ -3860,65 +4051,7 @@
     </p:spTree>
     <p:extLst>
       <p:ext uri="{BB962C8B-B14F-4D97-AF65-F5344CB8AC3E}">
-        <p14:creationId xmlns:p14="http://schemas.microsoft.com/office/powerpoint/2010/main" val="1005695920"/>
-      </p:ext>
-    </p:extLst>
-  </p:cSld>
-  <p:clrMapOvr>
-    <a:masterClrMapping/>
-  </p:clrMapOvr>
-</p:sld>
-</file>
-
-<file path=ppt/slides/slide14.xml><?xml version="1.0" encoding="utf-8"?>
-<p:sld xmlns:a="http://schemas.openxmlformats.org/drawingml/2006/main" xmlns:r="http://schemas.openxmlformats.org/officeDocument/2006/relationships" xmlns:p="http://schemas.openxmlformats.org/presentationml/2006/main">
-  <p:cSld>
-    <p:spTree>
-      <p:nvGrpSpPr>
-        <p:cNvPr id="1" name=""/>
-        <p:cNvGrpSpPr/>
-        <p:nvPr/>
-      </p:nvGrpSpPr>
-      <p:grpSpPr>
-        <a:xfrm>
-          <a:off x="0" y="0"/>
-          <a:ext cx="0" cy="0"/>
-          <a:chOff x="0" y="0"/>
-          <a:chExt cx="0" cy="0"/>
-        </a:xfrm>
-      </p:grpSpPr>
-      <p:sp>
-        <p:nvSpPr>
-          <p:cNvPr id="2" name="标题 1"/>
-          <p:cNvSpPr>
-            <a:spLocks noGrp="1"/>
-          </p:cNvSpPr>
-          <p:nvPr>
-            <p:ph type="title"/>
-          </p:nvPr>
-        </p:nvSpPr>
-        <p:spPr>
-          <a:xfrm>
-            <a:off x="0" y="0"/>
-            <a:ext cx="5290457" cy="892629"/>
-          </a:xfrm>
-        </p:spPr>
-        <p:txBody>
-          <a:bodyPr/>
-          <a:lstStyle/>
-          <a:p>
-            <a:r>
-              <a:rPr lang="en-US" altLang="zh-CN" dirty="0" smtClean="0"/>
-              <a:t>XXX</a:t>
-            </a:r>
-            <a:endParaRPr lang="zh-CN" altLang="en-US" dirty="0"/>
-          </a:p>
-        </p:txBody>
-      </p:sp>
-    </p:spTree>
-    <p:extLst>
-      <p:ext uri="{BB962C8B-B14F-4D97-AF65-F5344CB8AC3E}">
-        <p14:creationId xmlns:p14="http://schemas.microsoft.com/office/powerpoint/2010/main" val="2507301100"/>
+        <p14:creationId xmlns:p14="http://schemas.microsoft.com/office/powerpoint/2010/main" val="2273202581"/>
       </p:ext>
     </p:extLst>
   </p:cSld>
@@ -3966,17 +4099,108 @@
           <a:lstStyle/>
           <a:p>
             <a:r>
-              <a:rPr lang="en-US" altLang="zh-CN" dirty="0" smtClean="0"/>
-              <a:t>XXX</a:t>
-            </a:r>
-            <a:endParaRPr lang="zh-CN" altLang="en-US" dirty="0"/>
+              <a:rPr lang="en-US" altLang="zh-CN" dirty="0" err="1"/>
+              <a:t>Vercel</a:t>
+            </a:r>
+            <a:r>
+              <a:rPr lang="zh-CN" altLang="en-US" dirty="0"/>
+              <a:t>云系统</a:t>
+            </a:r>
+          </a:p>
+        </p:txBody>
+      </p:sp>
+      <p:pic>
+        <p:nvPicPr>
+          <p:cNvPr id="3" name="图片 2"/>
+          <p:cNvPicPr>
+            <a:picLocks noChangeAspect="1"/>
+          </p:cNvPicPr>
+          <p:nvPr/>
+        </p:nvPicPr>
+        <p:blipFill>
+          <a:blip r:embed="rId2"/>
+          <a:stretch>
+            <a:fillRect/>
+          </a:stretch>
+        </p:blipFill>
+        <p:spPr>
+          <a:xfrm>
+            <a:off x="310524" y="1404257"/>
+            <a:ext cx="2980016" cy="4318498"/>
+          </a:xfrm>
+          <a:prstGeom prst="rect">
+            <a:avLst/>
+          </a:prstGeom>
+        </p:spPr>
+      </p:pic>
+      <p:pic>
+        <p:nvPicPr>
+          <p:cNvPr id="5" name="图片 4"/>
+          <p:cNvPicPr>
+            <a:picLocks noChangeAspect="1"/>
+          </p:cNvPicPr>
+          <p:nvPr/>
+        </p:nvPicPr>
+        <p:blipFill>
+          <a:blip r:embed="rId3"/>
+          <a:stretch>
+            <a:fillRect/>
+          </a:stretch>
+        </p:blipFill>
+        <p:spPr>
+          <a:xfrm>
+            <a:off x="5095059" y="892629"/>
+            <a:ext cx="5920842" cy="5683613"/>
+          </a:xfrm>
+          <a:prstGeom prst="rect">
+            <a:avLst/>
+          </a:prstGeom>
+        </p:spPr>
+      </p:pic>
+      <p:sp>
+        <p:nvSpPr>
+          <p:cNvPr id="7" name="圆角矩形标注 6"/>
+          <p:cNvSpPr/>
+          <p:nvPr/>
+        </p:nvSpPr>
+        <p:spPr>
+          <a:xfrm>
+            <a:off x="3543300" y="1017814"/>
+            <a:ext cx="1224643" cy="1077686"/>
+          </a:xfrm>
+          <a:prstGeom prst="wedgeRoundRectCallout">
+            <a:avLst/>
+          </a:prstGeom>
+        </p:spPr>
+        <p:style>
+          <a:lnRef idx="2">
+            <a:schemeClr val="accent1">
+              <a:shade val="50000"/>
+            </a:schemeClr>
+          </a:lnRef>
+          <a:fillRef idx="1">
+            <a:schemeClr val="accent1"/>
+          </a:fillRef>
+          <a:effectRef idx="0">
+            <a:schemeClr val="accent1"/>
+          </a:effectRef>
+          <a:fontRef idx="minor">
+            <a:schemeClr val="lt1"/>
+          </a:fontRef>
+        </p:style>
+        <p:txBody>
+          <a:bodyPr rtlCol="0" anchor="ctr"/>
+          <a:lstStyle/>
+          <a:p>
+            <a:pPr algn="ctr"/>
+            <a:endParaRPr lang="zh-CN" altLang="en-US"/>
           </a:p>
         </p:txBody>
       </p:sp>
     </p:spTree>
     <p:extLst>
       <p:ext uri="{BB962C8B-B14F-4D97-AF65-F5344CB8AC3E}">
-        <p14:creationId xmlns:p14="http://schemas.microsoft.com/office/powerpoint/2010/main" val="3721337255"/>
+        <p14:creationId xmlns:p14="http://schemas.microsoft.com/office/powerpoint/2010/main" val="2507301100"/>
       </p:ext>
     </p:extLst>
   </p:cSld>
@@ -4024,17 +4248,45 @@
           <a:lstStyle/>
           <a:p>
             <a:r>
-              <a:rPr lang="en-US" altLang="zh-CN" dirty="0" smtClean="0"/>
-              <a:t>XXX</a:t>
+              <a:rPr lang="en-US" altLang="zh-CN" dirty="0" err="1" smtClean="0"/>
+              <a:t>Vercel</a:t>
+            </a:r>
+            <a:r>
+              <a:rPr lang="zh-TW" altLang="en-US" dirty="0" smtClean="0"/>
+              <a:t>云系统</a:t>
             </a:r>
             <a:endParaRPr lang="zh-CN" altLang="en-US" dirty="0"/>
           </a:p>
         </p:txBody>
       </p:sp>
+      <p:pic>
+        <p:nvPicPr>
+          <p:cNvPr id="5" name="图片 4"/>
+          <p:cNvPicPr>
+            <a:picLocks noChangeAspect="1"/>
+          </p:cNvPicPr>
+          <p:nvPr/>
+        </p:nvPicPr>
+        <p:blipFill>
+          <a:blip r:embed="rId2"/>
+          <a:stretch>
+            <a:fillRect/>
+          </a:stretch>
+        </p:blipFill>
+        <p:spPr>
+          <a:xfrm>
+            <a:off x="316474" y="1259872"/>
+            <a:ext cx="10779644" cy="4951351"/>
+          </a:xfrm>
+          <a:prstGeom prst="rect">
+            <a:avLst/>
+          </a:prstGeom>
+        </p:spPr>
+      </p:pic>
     </p:spTree>
     <p:extLst>
       <p:ext uri="{BB962C8B-B14F-4D97-AF65-F5344CB8AC3E}">
-        <p14:creationId xmlns:p14="http://schemas.microsoft.com/office/powerpoint/2010/main" val="3341943930"/>
+        <p14:creationId xmlns:p14="http://schemas.microsoft.com/office/powerpoint/2010/main" val="3721337255"/>
       </p:ext>
     </p:extLst>
   </p:cSld>
@@ -4071,20 +4323,112 @@
             <p:ph type="title"/>
           </p:nvPr>
         </p:nvSpPr>
-        <p:spPr>
-          <a:xfrm>
-            <a:off x="0" y="0"/>
-            <a:ext cx="5290457" cy="892629"/>
-          </a:xfrm>
-        </p:spPr>
+        <p:spPr/>
         <p:txBody>
           <a:bodyPr/>
           <a:lstStyle/>
           <a:p>
             <a:r>
+              <a:rPr lang="zh-CN" altLang="en-US" dirty="0"/>
+              <a:t>三件套</a:t>
+            </a:r>
+            <a:r>
+              <a:rPr lang="zh-CN" altLang="en-US" dirty="0" smtClean="0"/>
+              <a:t>网址</a:t>
+            </a:r>
+            <a:r>
               <a:rPr lang="en-US" altLang="zh-CN" dirty="0" smtClean="0"/>
-              <a:t>XXX</a:t>
-            </a:r>
+              <a:t>(</a:t>
+            </a:r>
+            <a:r>
+              <a:rPr lang="zh-TW" altLang="en-US" dirty="0" smtClean="0"/>
+              <a:t>不用</a:t>
+            </a:r>
+            <a:r>
+              <a:rPr lang="en-US" altLang="zh-TW" dirty="0" smtClean="0"/>
+              <a:t>VPN</a:t>
+            </a:r>
+            <a:r>
+              <a:rPr lang="zh-TW" altLang="en-US" dirty="0" smtClean="0"/>
+              <a:t>可进</a:t>
+            </a:r>
+            <a:r>
+              <a:rPr lang="en-US" altLang="zh-CN" dirty="0" smtClean="0"/>
+              <a:t>)</a:t>
+            </a:r>
+            <a:endParaRPr lang="zh-CN" altLang="en-US" dirty="0"/>
+          </a:p>
+        </p:txBody>
+      </p:sp>
+      <p:sp>
+        <p:nvSpPr>
+          <p:cNvPr id="3" name="内容占位符 2"/>
+          <p:cNvSpPr>
+            <a:spLocks noGrp="1"/>
+          </p:cNvSpPr>
+          <p:nvPr>
+            <p:ph idx="1"/>
+          </p:nvPr>
+        </p:nvSpPr>
+        <p:spPr/>
+        <p:txBody>
+          <a:bodyPr/>
+          <a:lstStyle/>
+          <a:p>
+            <a:r>
+              <a:rPr lang="en-US" altLang="zh-CN" dirty="0">
+                <a:hlinkClick r:id="rId2"/>
+              </a:rPr>
+              <a:t>https://</a:t>
+            </a:r>
+            <a:r>
+              <a:rPr lang="en-US" altLang="zh-CN" dirty="0" smtClean="0">
+                <a:hlinkClick r:id="rId2"/>
+              </a:rPr>
+              <a:t>github.com/a0956610123</a:t>
+            </a:r>
+            <a:endParaRPr lang="en-US" altLang="zh-CN" dirty="0" smtClean="0"/>
+          </a:p>
+          <a:p>
+            <a:endParaRPr lang="en-US" altLang="zh-CN" dirty="0"/>
+          </a:p>
+          <a:p>
+            <a:r>
+              <a:rPr lang="en-US" altLang="zh-CN" dirty="0">
+                <a:hlinkClick r:id="rId3"/>
+              </a:rPr>
+              <a:t>https://</a:t>
+            </a:r>
+            <a:r>
+              <a:rPr lang="en-US" altLang="zh-CN" dirty="0" smtClean="0">
+                <a:hlinkClick r:id="rId3"/>
+              </a:rPr>
+              <a:t>supabase.com/dashboard/org/kmovfeeviopbagotvwcy</a:t>
+            </a:r>
+            <a:endParaRPr lang="en-US" altLang="zh-CN" dirty="0" smtClean="0"/>
+          </a:p>
+          <a:p>
+            <a:endParaRPr lang="en-US" altLang="zh-CN" dirty="0"/>
+          </a:p>
+          <a:p>
+            <a:r>
+              <a:rPr lang="en-US" altLang="zh-CN" dirty="0">
+                <a:hlinkClick r:id="rId4"/>
+              </a:rPr>
+              <a:t>https://</a:t>
+            </a:r>
+            <a:r>
+              <a:rPr lang="en-US" altLang="zh-CN" dirty="0" smtClean="0">
+                <a:hlinkClick r:id="rId4"/>
+              </a:rPr>
+              <a:t>vercel.com/a956610123tw</a:t>
+            </a:r>
+            <a:endParaRPr lang="en-US" altLang="zh-CN" dirty="0" smtClean="0"/>
+          </a:p>
+          <a:p>
+            <a:endParaRPr lang="en-US" altLang="zh-CN" dirty="0"/>
+          </a:p>
+          <a:p>
             <a:endParaRPr lang="zh-CN" altLang="en-US" dirty="0"/>
           </a:p>
         </p:txBody>
@@ -4092,7 +4436,7 @@
     </p:spTree>
     <p:extLst>
       <p:ext uri="{BB962C8B-B14F-4D97-AF65-F5344CB8AC3E}">
-        <p14:creationId xmlns:p14="http://schemas.microsoft.com/office/powerpoint/2010/main" val="258759547"/>
+        <p14:creationId xmlns:p14="http://schemas.microsoft.com/office/powerpoint/2010/main" val="2175816889"/>
       </p:ext>
     </p:extLst>
   </p:cSld>
@@ -4129,28 +4473,2462 @@
             <p:ph type="title"/>
           </p:nvPr>
         </p:nvSpPr>
-        <p:spPr>
-          <a:xfrm>
-            <a:off x="0" y="0"/>
-            <a:ext cx="5290457" cy="892629"/>
-          </a:xfrm>
-        </p:spPr>
+        <p:spPr/>
         <p:txBody>
           <a:bodyPr/>
           <a:lstStyle/>
           <a:p>
             <a:r>
-              <a:rPr lang="en-US" altLang="zh-CN" dirty="0" smtClean="0"/>
-              <a:t>XXX</a:t>
+              <a:rPr lang="zh-TW" altLang="en-US" dirty="0" smtClean="0"/>
+              <a:t>云网站服务比较</a:t>
             </a:r>
             <a:endParaRPr lang="zh-CN" altLang="en-US" dirty="0"/>
           </a:p>
         </p:txBody>
       </p:sp>
+      <p:graphicFrame>
+        <p:nvGraphicFramePr>
+          <p:cNvPr id="4" name="内容占位符 3"/>
+          <p:cNvGraphicFramePr>
+            <a:graphicFrameLocks noGrp="1"/>
+          </p:cNvGraphicFramePr>
+          <p:nvPr>
+            <p:ph idx="1"/>
+            <p:extLst>
+              <p:ext uri="{D42A27DB-BD31-4B8C-83A1-F6EECF244321}">
+                <p14:modId xmlns:p14="http://schemas.microsoft.com/office/powerpoint/2010/main" val="254380809"/>
+              </p:ext>
+            </p:extLst>
+          </p:nvPr>
+        </p:nvGraphicFramePr>
+        <p:xfrm>
+          <a:off x="1159327" y="1825625"/>
+          <a:ext cx="9639301" cy="4351339"/>
+        </p:xfrm>
+        <a:graphic>
+          <a:graphicData uri="http://schemas.openxmlformats.org/drawingml/2006/table">
+            <a:tbl>
+              <a:tblPr/>
+              <a:tblGrid>
+                <a:gridCol w="1377043">
+                  <a:extLst>
+                    <a:ext uri="{9D8B030D-6E8A-4147-A177-3AD203B41FA5}">
+                      <a16:colId xmlns:a16="http://schemas.microsoft.com/office/drawing/2014/main" val="3179036995"/>
+                    </a:ext>
+                  </a:extLst>
+                </a:gridCol>
+                <a:gridCol w="1377043">
+                  <a:extLst>
+                    <a:ext uri="{9D8B030D-6E8A-4147-A177-3AD203B41FA5}">
+                      <a16:colId xmlns:a16="http://schemas.microsoft.com/office/drawing/2014/main" val="171750343"/>
+                    </a:ext>
+                  </a:extLst>
+                </a:gridCol>
+                <a:gridCol w="1377043">
+                  <a:extLst>
+                    <a:ext uri="{9D8B030D-6E8A-4147-A177-3AD203B41FA5}">
+                      <a16:colId xmlns:a16="http://schemas.microsoft.com/office/drawing/2014/main" val="1034150378"/>
+                    </a:ext>
+                  </a:extLst>
+                </a:gridCol>
+                <a:gridCol w="1377043">
+                  <a:extLst>
+                    <a:ext uri="{9D8B030D-6E8A-4147-A177-3AD203B41FA5}">
+                      <a16:colId xmlns:a16="http://schemas.microsoft.com/office/drawing/2014/main" val="3420093833"/>
+                    </a:ext>
+                  </a:extLst>
+                </a:gridCol>
+                <a:gridCol w="1377043">
+                  <a:extLst>
+                    <a:ext uri="{9D8B030D-6E8A-4147-A177-3AD203B41FA5}">
+                      <a16:colId xmlns:a16="http://schemas.microsoft.com/office/drawing/2014/main" val="2935643204"/>
+                    </a:ext>
+                  </a:extLst>
+                </a:gridCol>
+                <a:gridCol w="1377043">
+                  <a:extLst>
+                    <a:ext uri="{9D8B030D-6E8A-4147-A177-3AD203B41FA5}">
+                      <a16:colId xmlns:a16="http://schemas.microsoft.com/office/drawing/2014/main" val="4229097384"/>
+                    </a:ext>
+                  </a:extLst>
+                </a:gridCol>
+                <a:gridCol w="1377043">
+                  <a:extLst>
+                    <a:ext uri="{9D8B030D-6E8A-4147-A177-3AD203B41FA5}">
+                      <a16:colId xmlns:a16="http://schemas.microsoft.com/office/drawing/2014/main" val="4197302580"/>
+                    </a:ext>
+                  </a:extLst>
+                </a:gridCol>
+              </a:tblGrid>
+              <a:tr h="939364">
+                <a:tc>
+                  <a:txBody>
+                    <a:bodyPr/>
+                    <a:lstStyle/>
+                    <a:p>
+                      <a:pPr algn="l"/>
+                      <a:r>
+                        <a:rPr lang="zh-CN" altLang="en-US" sz="1400">
+                          <a:effectLst/>
+                        </a:rPr>
+                        <a:t>平台</a:t>
+                      </a:r>
+                    </a:p>
+                  </a:txBody>
+                  <a:tcPr marL="7138" marR="7138" marT="7138" marB="7138" anchor="ctr">
+                    <a:lnL w="4763" cap="flat" cmpd="sng" algn="ctr">
+                      <a:solidFill>
+                        <a:srgbClr val="CCCCCC"/>
+                      </a:solidFill>
+                      <a:prstDash val="solid"/>
+                      <a:round/>
+                      <a:headEnd type="none" w="med" len="med"/>
+                      <a:tailEnd type="none" w="med" len="med"/>
+                    </a:lnL>
+                    <a:lnR w="4763" cap="flat" cmpd="sng" algn="ctr">
+                      <a:solidFill>
+                        <a:srgbClr val="CCCCCC"/>
+                      </a:solidFill>
+                      <a:prstDash val="solid"/>
+                      <a:round/>
+                      <a:headEnd type="none" w="med" len="med"/>
+                      <a:tailEnd type="none" w="med" len="med"/>
+                    </a:lnR>
+                    <a:lnT w="4763" cap="flat" cmpd="sng" algn="ctr">
+                      <a:solidFill>
+                        <a:srgbClr val="CCCCCC"/>
+                      </a:solidFill>
+                      <a:prstDash val="solid"/>
+                      <a:round/>
+                      <a:headEnd type="none" w="med" len="med"/>
+                      <a:tailEnd type="none" w="med" len="med"/>
+                    </a:lnT>
+                    <a:lnB w="4763" cap="flat" cmpd="sng" algn="ctr">
+                      <a:solidFill>
+                        <a:srgbClr val="CCCCCC"/>
+                      </a:solidFill>
+                      <a:prstDash val="solid"/>
+                      <a:round/>
+                      <a:headEnd type="none" w="med" len="med"/>
+                      <a:tailEnd type="none" w="med" len="med"/>
+                    </a:lnB>
+                  </a:tcPr>
+                </a:tc>
+                <a:tc>
+                  <a:txBody>
+                    <a:bodyPr/>
+                    <a:lstStyle/>
+                    <a:p>
+                      <a:pPr algn="l"/>
+                      <a:r>
+                        <a:rPr lang="zh-CN" altLang="en-US" sz="1400">
+                          <a:effectLst/>
+                        </a:rPr>
+                        <a:t>是否支持 </a:t>
+                      </a:r>
+                      <a:r>
+                        <a:rPr lang="en-US" sz="1400">
+                          <a:effectLst/>
+                        </a:rPr>
+                        <a:t>Flask/Python </a:t>
+                      </a:r>
+                      <a:r>
+                        <a:rPr lang="zh-CN" altLang="en-US" sz="1400">
+                          <a:effectLst/>
+                        </a:rPr>
+                        <a:t>后端</a:t>
+                      </a:r>
+                    </a:p>
+                  </a:txBody>
+                  <a:tcPr marL="7138" marR="7138" marT="7138" marB="7138" anchor="ctr">
+                    <a:lnL w="4763" cap="flat" cmpd="sng" algn="ctr">
+                      <a:solidFill>
+                        <a:srgbClr val="CCCCCC"/>
+                      </a:solidFill>
+                      <a:prstDash val="solid"/>
+                      <a:round/>
+                      <a:headEnd type="none" w="med" len="med"/>
+                      <a:tailEnd type="none" w="med" len="med"/>
+                    </a:lnL>
+                    <a:lnR w="4763" cap="flat" cmpd="sng" algn="ctr">
+                      <a:solidFill>
+                        <a:srgbClr val="CCCCCC"/>
+                      </a:solidFill>
+                      <a:prstDash val="solid"/>
+                      <a:round/>
+                      <a:headEnd type="none" w="med" len="med"/>
+                      <a:tailEnd type="none" w="med" len="med"/>
+                    </a:lnR>
+                    <a:lnT w="4763" cap="flat" cmpd="sng" algn="ctr">
+                      <a:solidFill>
+                        <a:srgbClr val="CCCCCC"/>
+                      </a:solidFill>
+                      <a:prstDash val="solid"/>
+                      <a:round/>
+                      <a:headEnd type="none" w="med" len="med"/>
+                      <a:tailEnd type="none" w="med" len="med"/>
+                    </a:lnT>
+                    <a:lnB w="4763" cap="flat" cmpd="sng" algn="ctr">
+                      <a:solidFill>
+                        <a:srgbClr val="CCCCCC"/>
+                      </a:solidFill>
+                      <a:prstDash val="solid"/>
+                      <a:round/>
+                      <a:headEnd type="none" w="med" len="med"/>
+                      <a:tailEnd type="none" w="med" len="med"/>
+                    </a:lnB>
+                  </a:tcPr>
+                </a:tc>
+                <a:tc>
+                  <a:txBody>
+                    <a:bodyPr/>
+                    <a:lstStyle/>
+                    <a:p>
+                      <a:pPr algn="l"/>
+                      <a:r>
+                        <a:rPr lang="zh-CN" altLang="en-US" sz="1400">
+                          <a:effectLst/>
+                        </a:rPr>
+                        <a:t>国内访问速度</a:t>
+                      </a:r>
+                    </a:p>
+                  </a:txBody>
+                  <a:tcPr marL="7138" marR="7138" marT="7138" marB="7138" anchor="ctr">
+                    <a:lnL w="4763" cap="flat" cmpd="sng" algn="ctr">
+                      <a:solidFill>
+                        <a:srgbClr val="CCCCCC"/>
+                      </a:solidFill>
+                      <a:prstDash val="solid"/>
+                      <a:round/>
+                      <a:headEnd type="none" w="med" len="med"/>
+                      <a:tailEnd type="none" w="med" len="med"/>
+                    </a:lnL>
+                    <a:lnR w="4763" cap="flat" cmpd="sng" algn="ctr">
+                      <a:solidFill>
+                        <a:srgbClr val="CCCCCC"/>
+                      </a:solidFill>
+                      <a:prstDash val="solid"/>
+                      <a:round/>
+                      <a:headEnd type="none" w="med" len="med"/>
+                      <a:tailEnd type="none" w="med" len="med"/>
+                    </a:lnR>
+                    <a:lnT w="4763" cap="flat" cmpd="sng" algn="ctr">
+                      <a:solidFill>
+                        <a:srgbClr val="CCCCCC"/>
+                      </a:solidFill>
+                      <a:prstDash val="solid"/>
+                      <a:round/>
+                      <a:headEnd type="none" w="med" len="med"/>
+                      <a:tailEnd type="none" w="med" len="med"/>
+                    </a:lnT>
+                    <a:lnB w="4763" cap="flat" cmpd="sng" algn="ctr">
+                      <a:solidFill>
+                        <a:srgbClr val="CCCCCC"/>
+                      </a:solidFill>
+                      <a:prstDash val="solid"/>
+                      <a:round/>
+                      <a:headEnd type="none" w="med" len="med"/>
+                      <a:tailEnd type="none" w="med" len="med"/>
+                    </a:lnB>
+                  </a:tcPr>
+                </a:tc>
+                <a:tc>
+                  <a:txBody>
+                    <a:bodyPr/>
+                    <a:lstStyle/>
+                    <a:p>
+                      <a:pPr algn="l"/>
+                      <a:r>
+                        <a:rPr lang="zh-CN" altLang="en-US" sz="1400">
+                          <a:effectLst/>
+                        </a:rPr>
+                        <a:t>免备案二级域名</a:t>
+                      </a:r>
+                    </a:p>
+                  </a:txBody>
+                  <a:tcPr marL="7138" marR="7138" marT="7138" marB="7138" anchor="ctr">
+                    <a:lnL w="4763" cap="flat" cmpd="sng" algn="ctr">
+                      <a:solidFill>
+                        <a:srgbClr val="CCCCCC"/>
+                      </a:solidFill>
+                      <a:prstDash val="solid"/>
+                      <a:round/>
+                      <a:headEnd type="none" w="med" len="med"/>
+                      <a:tailEnd type="none" w="med" len="med"/>
+                    </a:lnL>
+                    <a:lnR w="4763" cap="flat" cmpd="sng" algn="ctr">
+                      <a:solidFill>
+                        <a:srgbClr val="CCCCCC"/>
+                      </a:solidFill>
+                      <a:prstDash val="solid"/>
+                      <a:round/>
+                      <a:headEnd type="none" w="med" len="med"/>
+                      <a:tailEnd type="none" w="med" len="med"/>
+                    </a:lnR>
+                    <a:lnT w="4763" cap="flat" cmpd="sng" algn="ctr">
+                      <a:solidFill>
+                        <a:srgbClr val="CCCCCC"/>
+                      </a:solidFill>
+                      <a:prstDash val="solid"/>
+                      <a:round/>
+                      <a:headEnd type="none" w="med" len="med"/>
+                      <a:tailEnd type="none" w="med" len="med"/>
+                    </a:lnT>
+                    <a:lnB w="4763" cap="flat" cmpd="sng" algn="ctr">
+                      <a:solidFill>
+                        <a:srgbClr val="CCCCCC"/>
+                      </a:solidFill>
+                      <a:prstDash val="solid"/>
+                      <a:round/>
+                      <a:headEnd type="none" w="med" len="med"/>
+                      <a:tailEnd type="none" w="med" len="med"/>
+                    </a:lnB>
+                  </a:tcPr>
+                </a:tc>
+                <a:tc>
+                  <a:txBody>
+                    <a:bodyPr/>
+                    <a:lstStyle/>
+                    <a:p>
+                      <a:pPr algn="l"/>
+                      <a:r>
+                        <a:rPr lang="zh-CN" altLang="en-US" sz="1400">
+                          <a:effectLst/>
+                        </a:rPr>
+                        <a:t>预览环境 </a:t>
+                      </a:r>
+                      <a:r>
+                        <a:rPr lang="en-US" altLang="zh-CN" sz="1400">
+                          <a:effectLst/>
+                        </a:rPr>
+                        <a:t>/ PR </a:t>
+                      </a:r>
+                      <a:r>
+                        <a:rPr lang="zh-CN" altLang="en-US" sz="1400">
+                          <a:effectLst/>
+                        </a:rPr>
+                        <a:t>部署</a:t>
+                      </a:r>
+                    </a:p>
+                  </a:txBody>
+                  <a:tcPr marL="7138" marR="7138" marT="7138" marB="7138" anchor="ctr">
+                    <a:lnL w="4763" cap="flat" cmpd="sng" algn="ctr">
+                      <a:solidFill>
+                        <a:srgbClr val="CCCCCC"/>
+                      </a:solidFill>
+                      <a:prstDash val="solid"/>
+                      <a:round/>
+                      <a:headEnd type="none" w="med" len="med"/>
+                      <a:tailEnd type="none" w="med" len="med"/>
+                    </a:lnL>
+                    <a:lnR w="4763" cap="flat" cmpd="sng" algn="ctr">
+                      <a:solidFill>
+                        <a:srgbClr val="CCCCCC"/>
+                      </a:solidFill>
+                      <a:prstDash val="solid"/>
+                      <a:round/>
+                      <a:headEnd type="none" w="med" len="med"/>
+                      <a:tailEnd type="none" w="med" len="med"/>
+                    </a:lnR>
+                    <a:lnT w="4763" cap="flat" cmpd="sng" algn="ctr">
+                      <a:solidFill>
+                        <a:srgbClr val="CCCCCC"/>
+                      </a:solidFill>
+                      <a:prstDash val="solid"/>
+                      <a:round/>
+                      <a:headEnd type="none" w="med" len="med"/>
+                      <a:tailEnd type="none" w="med" len="med"/>
+                    </a:lnT>
+                    <a:lnB w="4763" cap="flat" cmpd="sng" algn="ctr">
+                      <a:solidFill>
+                        <a:srgbClr val="CCCCCC"/>
+                      </a:solidFill>
+                      <a:prstDash val="solid"/>
+                      <a:round/>
+                      <a:headEnd type="none" w="med" len="med"/>
+                      <a:tailEnd type="none" w="med" len="med"/>
+                    </a:lnB>
+                  </a:tcPr>
+                </a:tc>
+                <a:tc>
+                  <a:txBody>
+                    <a:bodyPr/>
+                    <a:lstStyle/>
+                    <a:p>
+                      <a:pPr algn="l"/>
+                      <a:r>
+                        <a:rPr lang="zh-CN" altLang="en-US" sz="1400">
+                          <a:effectLst/>
+                        </a:rPr>
+                        <a:t>内置数据库</a:t>
+                      </a:r>
+                    </a:p>
+                  </a:txBody>
+                  <a:tcPr marL="7138" marR="7138" marT="7138" marB="7138" anchor="ctr">
+                    <a:lnL w="4763" cap="flat" cmpd="sng" algn="ctr">
+                      <a:solidFill>
+                        <a:srgbClr val="CCCCCC"/>
+                      </a:solidFill>
+                      <a:prstDash val="solid"/>
+                      <a:round/>
+                      <a:headEnd type="none" w="med" len="med"/>
+                      <a:tailEnd type="none" w="med" len="med"/>
+                    </a:lnL>
+                    <a:lnR w="4763" cap="flat" cmpd="sng" algn="ctr">
+                      <a:solidFill>
+                        <a:srgbClr val="CCCCCC"/>
+                      </a:solidFill>
+                      <a:prstDash val="solid"/>
+                      <a:round/>
+                      <a:headEnd type="none" w="med" len="med"/>
+                      <a:tailEnd type="none" w="med" len="med"/>
+                    </a:lnR>
+                    <a:lnT w="4763" cap="flat" cmpd="sng" algn="ctr">
+                      <a:solidFill>
+                        <a:srgbClr val="CCCCCC"/>
+                      </a:solidFill>
+                      <a:prstDash val="solid"/>
+                      <a:round/>
+                      <a:headEnd type="none" w="med" len="med"/>
+                      <a:tailEnd type="none" w="med" len="med"/>
+                    </a:lnT>
+                    <a:lnB w="4763" cap="flat" cmpd="sng" algn="ctr">
+                      <a:solidFill>
+                        <a:srgbClr val="CCCCCC"/>
+                      </a:solidFill>
+                      <a:prstDash val="solid"/>
+                      <a:round/>
+                      <a:headEnd type="none" w="med" len="med"/>
+                      <a:tailEnd type="none" w="med" len="med"/>
+                    </a:lnB>
+                  </a:tcPr>
+                </a:tc>
+                <a:tc>
+                  <a:txBody>
+                    <a:bodyPr/>
+                    <a:lstStyle/>
+                    <a:p>
+                      <a:pPr algn="l"/>
+                      <a:r>
+                        <a:rPr lang="zh-CN" altLang="en-US" sz="1400">
+                          <a:effectLst/>
+                        </a:rPr>
+                        <a:t>适合场景</a:t>
+                      </a:r>
+                    </a:p>
+                  </a:txBody>
+                  <a:tcPr marL="7138" marR="7138" marT="7138" marB="7138" anchor="ctr">
+                    <a:lnL w="4763" cap="flat" cmpd="sng" algn="ctr">
+                      <a:solidFill>
+                        <a:srgbClr val="CCCCCC"/>
+                      </a:solidFill>
+                      <a:prstDash val="solid"/>
+                      <a:round/>
+                      <a:headEnd type="none" w="med" len="med"/>
+                      <a:tailEnd type="none" w="med" len="med"/>
+                    </a:lnL>
+                    <a:lnR w="4763" cap="flat" cmpd="sng" algn="ctr">
+                      <a:solidFill>
+                        <a:srgbClr val="CCCCCC"/>
+                      </a:solidFill>
+                      <a:prstDash val="solid"/>
+                      <a:round/>
+                      <a:headEnd type="none" w="med" len="med"/>
+                      <a:tailEnd type="none" w="med" len="med"/>
+                    </a:lnR>
+                    <a:lnT w="4763" cap="flat" cmpd="sng" algn="ctr">
+                      <a:solidFill>
+                        <a:srgbClr val="CCCCCC"/>
+                      </a:solidFill>
+                      <a:prstDash val="solid"/>
+                      <a:round/>
+                      <a:headEnd type="none" w="med" len="med"/>
+                      <a:tailEnd type="none" w="med" len="med"/>
+                    </a:lnT>
+                    <a:lnB w="4763" cap="flat" cmpd="sng" algn="ctr">
+                      <a:solidFill>
+                        <a:srgbClr val="CCCCCC"/>
+                      </a:solidFill>
+                      <a:prstDash val="solid"/>
+                      <a:round/>
+                      <a:headEnd type="none" w="med" len="med"/>
+                      <a:tailEnd type="none" w="med" len="med"/>
+                    </a:lnB>
+                  </a:tcPr>
+                </a:tc>
+                <a:extLst>
+                  <a:ext uri="{0D108BD9-81ED-4DB2-BD59-A6C34878D82A}">
+                    <a16:rowId xmlns:a16="http://schemas.microsoft.com/office/drawing/2014/main" val="64683381"/>
+                  </a:ext>
+                </a:extLst>
+              </a:tr>
+              <a:tr h="836576">
+                <a:tc>
+                  <a:txBody>
+                    <a:bodyPr/>
+                    <a:lstStyle/>
+                    <a:p>
+                      <a:pPr algn="l"/>
+                      <a:r>
+                        <a:rPr lang="en-US" sz="1400">
+                          <a:effectLst/>
+                        </a:rPr>
+                        <a:t>Vercel</a:t>
+                      </a:r>
+                    </a:p>
+                  </a:txBody>
+                  <a:tcPr marL="7138" marR="7138" marT="7138" marB="7138" anchor="ctr">
+                    <a:lnL w="4763" cap="flat" cmpd="sng" algn="ctr">
+                      <a:solidFill>
+                        <a:srgbClr val="CCCCCC"/>
+                      </a:solidFill>
+                      <a:prstDash val="solid"/>
+                      <a:round/>
+                      <a:headEnd type="none" w="med" len="med"/>
+                      <a:tailEnd type="none" w="med" len="med"/>
+                    </a:lnL>
+                    <a:lnR w="4763" cap="flat" cmpd="sng" algn="ctr">
+                      <a:solidFill>
+                        <a:srgbClr val="CCCCCC"/>
+                      </a:solidFill>
+                      <a:prstDash val="solid"/>
+                      <a:round/>
+                      <a:headEnd type="none" w="med" len="med"/>
+                      <a:tailEnd type="none" w="med" len="med"/>
+                    </a:lnR>
+                    <a:lnT w="4763" cap="flat" cmpd="sng" algn="ctr">
+                      <a:solidFill>
+                        <a:srgbClr val="CCCCCC"/>
+                      </a:solidFill>
+                      <a:prstDash val="solid"/>
+                      <a:round/>
+                      <a:headEnd type="none" w="med" len="med"/>
+                      <a:tailEnd type="none" w="med" len="med"/>
+                    </a:lnT>
+                    <a:lnB w="4763" cap="flat" cmpd="sng" algn="ctr">
+                      <a:solidFill>
+                        <a:srgbClr val="CCCCCC"/>
+                      </a:solidFill>
+                      <a:prstDash val="solid"/>
+                      <a:round/>
+                      <a:headEnd type="none" w="med" len="med"/>
+                      <a:tailEnd type="none" w="med" len="med"/>
+                    </a:lnB>
+                  </a:tcPr>
+                </a:tc>
+                <a:tc>
+                  <a:txBody>
+                    <a:bodyPr/>
+                    <a:lstStyle/>
+                    <a:p>
+                      <a:pPr algn="l"/>
+                      <a:r>
+                        <a:rPr lang="zh-CN" altLang="en-US" sz="1400">
+                          <a:effectLst/>
+                        </a:rPr>
+                        <a:t>✅</a:t>
+                      </a:r>
+                    </a:p>
+                  </a:txBody>
+                  <a:tcPr marL="7138" marR="7138" marT="7138" marB="7138" anchor="ctr">
+                    <a:lnL w="4763" cap="flat" cmpd="sng" algn="ctr">
+                      <a:solidFill>
+                        <a:srgbClr val="CCCCCC"/>
+                      </a:solidFill>
+                      <a:prstDash val="solid"/>
+                      <a:round/>
+                      <a:headEnd type="none" w="med" len="med"/>
+                      <a:tailEnd type="none" w="med" len="med"/>
+                    </a:lnL>
+                    <a:lnR w="4763" cap="flat" cmpd="sng" algn="ctr">
+                      <a:solidFill>
+                        <a:srgbClr val="CCCCCC"/>
+                      </a:solidFill>
+                      <a:prstDash val="solid"/>
+                      <a:round/>
+                      <a:headEnd type="none" w="med" len="med"/>
+                      <a:tailEnd type="none" w="med" len="med"/>
+                    </a:lnR>
+                    <a:lnT w="4763" cap="flat" cmpd="sng" algn="ctr">
+                      <a:solidFill>
+                        <a:srgbClr val="CCCCCC"/>
+                      </a:solidFill>
+                      <a:prstDash val="solid"/>
+                      <a:round/>
+                      <a:headEnd type="none" w="med" len="med"/>
+                      <a:tailEnd type="none" w="med" len="med"/>
+                    </a:lnT>
+                    <a:lnB w="4763" cap="flat" cmpd="sng" algn="ctr">
+                      <a:solidFill>
+                        <a:srgbClr val="CCCCCC"/>
+                      </a:solidFill>
+                      <a:prstDash val="solid"/>
+                      <a:round/>
+                      <a:headEnd type="none" w="med" len="med"/>
+                      <a:tailEnd type="none" w="med" len="med"/>
+                    </a:lnB>
+                  </a:tcPr>
+                </a:tc>
+                <a:tc>
+                  <a:txBody>
+                    <a:bodyPr/>
+                    <a:lstStyle/>
+                    <a:p>
+                      <a:pPr algn="l"/>
+                      <a:r>
+                        <a:rPr lang="zh-CN" altLang="en-US" sz="1400">
+                          <a:effectLst/>
+                        </a:rPr>
+                        <a:t>差，国内经常打不开</a:t>
+                      </a:r>
+                    </a:p>
+                  </a:txBody>
+                  <a:tcPr marL="7138" marR="7138" marT="7138" marB="7138" anchor="ctr">
+                    <a:lnL w="4763" cap="flat" cmpd="sng" algn="ctr">
+                      <a:solidFill>
+                        <a:srgbClr val="CCCCCC"/>
+                      </a:solidFill>
+                      <a:prstDash val="solid"/>
+                      <a:round/>
+                      <a:headEnd type="none" w="med" len="med"/>
+                      <a:tailEnd type="none" w="med" len="med"/>
+                    </a:lnL>
+                    <a:lnR w="4763" cap="flat" cmpd="sng" algn="ctr">
+                      <a:solidFill>
+                        <a:srgbClr val="CCCCCC"/>
+                      </a:solidFill>
+                      <a:prstDash val="solid"/>
+                      <a:round/>
+                      <a:headEnd type="none" w="med" len="med"/>
+                      <a:tailEnd type="none" w="med" len="med"/>
+                    </a:lnR>
+                    <a:lnT w="4763" cap="flat" cmpd="sng" algn="ctr">
+                      <a:solidFill>
+                        <a:srgbClr val="CCCCCC"/>
+                      </a:solidFill>
+                      <a:prstDash val="solid"/>
+                      <a:round/>
+                      <a:headEnd type="none" w="med" len="med"/>
+                      <a:tailEnd type="none" w="med" len="med"/>
+                    </a:lnT>
+                    <a:lnB w="4763" cap="flat" cmpd="sng" algn="ctr">
+                      <a:solidFill>
+                        <a:srgbClr val="CCCCCC"/>
+                      </a:solidFill>
+                      <a:prstDash val="solid"/>
+                      <a:round/>
+                      <a:headEnd type="none" w="med" len="med"/>
+                      <a:tailEnd type="none" w="med" len="med"/>
+                    </a:lnB>
+                  </a:tcPr>
+                </a:tc>
+                <a:tc>
+                  <a:txBody>
+                    <a:bodyPr/>
+                    <a:lstStyle/>
+                    <a:p>
+                      <a:pPr algn="l"/>
+                      <a:r>
+                        <a:rPr lang="zh-CN" altLang="en-US" sz="1400">
+                          <a:effectLst/>
+                        </a:rPr>
+                        <a:t>❌ </a:t>
+                      </a:r>
+                      <a:r>
+                        <a:rPr lang="en-US" altLang="zh-CN" sz="1400">
+                          <a:effectLst/>
+                        </a:rPr>
+                        <a:t>.</a:t>
+                      </a:r>
+                      <a:r>
+                        <a:rPr lang="en-US" sz="1400">
+                          <a:effectLst/>
+                        </a:rPr>
+                        <a:t>vercel.app </a:t>
+                      </a:r>
+                      <a:r>
+                        <a:rPr lang="zh-CN" altLang="en-US" sz="1400">
+                          <a:effectLst/>
+                        </a:rPr>
+                        <a:t>国内拦截</a:t>
+                      </a:r>
+                    </a:p>
+                  </a:txBody>
+                  <a:tcPr marL="7138" marR="7138" marT="7138" marB="7138" anchor="ctr">
+                    <a:lnL w="4763" cap="flat" cmpd="sng" algn="ctr">
+                      <a:solidFill>
+                        <a:srgbClr val="CCCCCC"/>
+                      </a:solidFill>
+                      <a:prstDash val="solid"/>
+                      <a:round/>
+                      <a:headEnd type="none" w="med" len="med"/>
+                      <a:tailEnd type="none" w="med" len="med"/>
+                    </a:lnL>
+                    <a:lnR w="4763" cap="flat" cmpd="sng" algn="ctr">
+                      <a:solidFill>
+                        <a:srgbClr val="CCCCCC"/>
+                      </a:solidFill>
+                      <a:prstDash val="solid"/>
+                      <a:round/>
+                      <a:headEnd type="none" w="med" len="med"/>
+                      <a:tailEnd type="none" w="med" len="med"/>
+                    </a:lnR>
+                    <a:lnT w="4763" cap="flat" cmpd="sng" algn="ctr">
+                      <a:solidFill>
+                        <a:srgbClr val="CCCCCC"/>
+                      </a:solidFill>
+                      <a:prstDash val="solid"/>
+                      <a:round/>
+                      <a:headEnd type="none" w="med" len="med"/>
+                      <a:tailEnd type="none" w="med" len="med"/>
+                    </a:lnT>
+                    <a:lnB w="4763" cap="flat" cmpd="sng" algn="ctr">
+                      <a:solidFill>
+                        <a:srgbClr val="CCCCCC"/>
+                      </a:solidFill>
+                      <a:prstDash val="solid"/>
+                      <a:round/>
+                      <a:headEnd type="none" w="med" len="med"/>
+                      <a:tailEnd type="none" w="med" len="med"/>
+                    </a:lnB>
+                  </a:tcPr>
+                </a:tc>
+                <a:tc>
+                  <a:txBody>
+                    <a:bodyPr/>
+                    <a:lstStyle/>
+                    <a:p>
+                      <a:pPr algn="l"/>
+                      <a:r>
+                        <a:rPr lang="zh-CN" altLang="en-US" sz="1400">
+                          <a:effectLst/>
+                        </a:rPr>
+                        <a:t>✅</a:t>
+                      </a:r>
+                    </a:p>
+                  </a:txBody>
+                  <a:tcPr marL="7138" marR="7138" marT="7138" marB="7138" anchor="ctr">
+                    <a:lnL w="4763" cap="flat" cmpd="sng" algn="ctr">
+                      <a:solidFill>
+                        <a:srgbClr val="CCCCCC"/>
+                      </a:solidFill>
+                      <a:prstDash val="solid"/>
+                      <a:round/>
+                      <a:headEnd type="none" w="med" len="med"/>
+                      <a:tailEnd type="none" w="med" len="med"/>
+                    </a:lnL>
+                    <a:lnR w="4763" cap="flat" cmpd="sng" algn="ctr">
+                      <a:solidFill>
+                        <a:srgbClr val="CCCCCC"/>
+                      </a:solidFill>
+                      <a:prstDash val="solid"/>
+                      <a:round/>
+                      <a:headEnd type="none" w="med" len="med"/>
+                      <a:tailEnd type="none" w="med" len="med"/>
+                    </a:lnR>
+                    <a:lnT w="4763" cap="flat" cmpd="sng" algn="ctr">
+                      <a:solidFill>
+                        <a:srgbClr val="CCCCCC"/>
+                      </a:solidFill>
+                      <a:prstDash val="solid"/>
+                      <a:round/>
+                      <a:headEnd type="none" w="med" len="med"/>
+                      <a:tailEnd type="none" w="med" len="med"/>
+                    </a:lnT>
+                    <a:lnB w="4763" cap="flat" cmpd="sng" algn="ctr">
+                      <a:solidFill>
+                        <a:srgbClr val="CCCCCC"/>
+                      </a:solidFill>
+                      <a:prstDash val="solid"/>
+                      <a:round/>
+                      <a:headEnd type="none" w="med" len="med"/>
+                      <a:tailEnd type="none" w="med" len="med"/>
+                    </a:lnB>
+                  </a:tcPr>
+                </a:tc>
+                <a:tc>
+                  <a:txBody>
+                    <a:bodyPr/>
+                    <a:lstStyle/>
+                    <a:p>
+                      <a:pPr algn="l"/>
+                      <a:r>
+                        <a:rPr lang="zh-CN" altLang="en-US" sz="1400">
+                          <a:effectLst/>
+                        </a:rPr>
+                        <a:t>✅ </a:t>
+                      </a:r>
+                      <a:r>
+                        <a:rPr lang="en-US" sz="1400">
+                          <a:effectLst/>
+                        </a:rPr>
+                        <a:t>Vercel Postgres</a:t>
+                      </a:r>
+                    </a:p>
+                  </a:txBody>
+                  <a:tcPr marL="7138" marR="7138" marT="7138" marB="7138" anchor="ctr">
+                    <a:lnL w="4763" cap="flat" cmpd="sng" algn="ctr">
+                      <a:solidFill>
+                        <a:srgbClr val="CCCCCC"/>
+                      </a:solidFill>
+                      <a:prstDash val="solid"/>
+                      <a:round/>
+                      <a:headEnd type="none" w="med" len="med"/>
+                      <a:tailEnd type="none" w="med" len="med"/>
+                    </a:lnL>
+                    <a:lnR w="4763" cap="flat" cmpd="sng" algn="ctr">
+                      <a:solidFill>
+                        <a:srgbClr val="CCCCCC"/>
+                      </a:solidFill>
+                      <a:prstDash val="solid"/>
+                      <a:round/>
+                      <a:headEnd type="none" w="med" len="med"/>
+                      <a:tailEnd type="none" w="med" len="med"/>
+                    </a:lnR>
+                    <a:lnT w="4763" cap="flat" cmpd="sng" algn="ctr">
+                      <a:solidFill>
+                        <a:srgbClr val="CCCCCC"/>
+                      </a:solidFill>
+                      <a:prstDash val="solid"/>
+                      <a:round/>
+                      <a:headEnd type="none" w="med" len="med"/>
+                      <a:tailEnd type="none" w="med" len="med"/>
+                    </a:lnT>
+                    <a:lnB w="4763" cap="flat" cmpd="sng" algn="ctr">
+                      <a:solidFill>
+                        <a:srgbClr val="CCCCCC"/>
+                      </a:solidFill>
+                      <a:prstDash val="solid"/>
+                      <a:round/>
+                      <a:headEnd type="none" w="med" len="med"/>
+                      <a:tailEnd type="none" w="med" len="med"/>
+                    </a:lnB>
+                  </a:tcPr>
+                </a:tc>
+                <a:tc>
+                  <a:txBody>
+                    <a:bodyPr/>
+                    <a:lstStyle/>
+                    <a:p>
+                      <a:pPr algn="l"/>
+                      <a:r>
+                        <a:rPr lang="zh-CN" altLang="en-US" sz="1400">
+                          <a:effectLst/>
+                        </a:rPr>
+                        <a:t>海外用户、海外业务</a:t>
+                      </a:r>
+                    </a:p>
+                  </a:txBody>
+                  <a:tcPr marL="7138" marR="7138" marT="7138" marB="7138" anchor="ctr">
+                    <a:lnL w="4763" cap="flat" cmpd="sng" algn="ctr">
+                      <a:solidFill>
+                        <a:srgbClr val="CCCCCC"/>
+                      </a:solidFill>
+                      <a:prstDash val="solid"/>
+                      <a:round/>
+                      <a:headEnd type="none" w="med" len="med"/>
+                      <a:tailEnd type="none" w="med" len="med"/>
+                    </a:lnL>
+                    <a:lnR w="4763" cap="flat" cmpd="sng" algn="ctr">
+                      <a:solidFill>
+                        <a:srgbClr val="CCCCCC"/>
+                      </a:solidFill>
+                      <a:prstDash val="solid"/>
+                      <a:round/>
+                      <a:headEnd type="none" w="med" len="med"/>
+                      <a:tailEnd type="none" w="med" len="med"/>
+                    </a:lnR>
+                    <a:lnT w="4763" cap="flat" cmpd="sng" algn="ctr">
+                      <a:solidFill>
+                        <a:srgbClr val="CCCCCC"/>
+                      </a:solidFill>
+                      <a:prstDash val="solid"/>
+                      <a:round/>
+                      <a:headEnd type="none" w="med" len="med"/>
+                      <a:tailEnd type="none" w="med" len="med"/>
+                    </a:lnT>
+                    <a:lnB w="4763" cap="flat" cmpd="sng" algn="ctr">
+                      <a:solidFill>
+                        <a:srgbClr val="CCCCCC"/>
+                      </a:solidFill>
+                      <a:prstDash val="solid"/>
+                      <a:round/>
+                      <a:headEnd type="none" w="med" len="med"/>
+                      <a:tailEnd type="none" w="med" len="med"/>
+                    </a:lnB>
+                  </a:tcPr>
+                </a:tc>
+                <a:extLst>
+                  <a:ext uri="{0D108BD9-81ED-4DB2-BD59-A6C34878D82A}">
+                    <a16:rowId xmlns:a16="http://schemas.microsoft.com/office/drawing/2014/main" val="428303805"/>
+                  </a:ext>
+                </a:extLst>
+              </a:tr>
+              <a:tr h="631001">
+                <a:tc>
+                  <a:txBody>
+                    <a:bodyPr/>
+                    <a:lstStyle/>
+                    <a:p>
+                      <a:pPr algn="l"/>
+                      <a:r>
+                        <a:rPr lang="en-US" sz="1400">
+                          <a:effectLst/>
+                        </a:rPr>
+                        <a:t>EdgeOne Pages</a:t>
+                      </a:r>
+                    </a:p>
+                  </a:txBody>
+                  <a:tcPr marL="7138" marR="7138" marT="7138" marB="7138" anchor="ctr">
+                    <a:lnL w="4763" cap="flat" cmpd="sng" algn="ctr">
+                      <a:solidFill>
+                        <a:srgbClr val="CCCCCC"/>
+                      </a:solidFill>
+                      <a:prstDash val="solid"/>
+                      <a:round/>
+                      <a:headEnd type="none" w="med" len="med"/>
+                      <a:tailEnd type="none" w="med" len="med"/>
+                    </a:lnL>
+                    <a:lnR w="4763" cap="flat" cmpd="sng" algn="ctr">
+                      <a:solidFill>
+                        <a:srgbClr val="CCCCCC"/>
+                      </a:solidFill>
+                      <a:prstDash val="solid"/>
+                      <a:round/>
+                      <a:headEnd type="none" w="med" len="med"/>
+                      <a:tailEnd type="none" w="med" len="med"/>
+                    </a:lnR>
+                    <a:lnT w="4763" cap="flat" cmpd="sng" algn="ctr">
+                      <a:solidFill>
+                        <a:srgbClr val="CCCCCC"/>
+                      </a:solidFill>
+                      <a:prstDash val="solid"/>
+                      <a:round/>
+                      <a:headEnd type="none" w="med" len="med"/>
+                      <a:tailEnd type="none" w="med" len="med"/>
+                    </a:lnT>
+                    <a:lnB w="4763" cap="flat" cmpd="sng" algn="ctr">
+                      <a:solidFill>
+                        <a:srgbClr val="CCCCCC"/>
+                      </a:solidFill>
+                      <a:prstDash val="solid"/>
+                      <a:round/>
+                      <a:headEnd type="none" w="med" len="med"/>
+                      <a:tailEnd type="none" w="med" len="med"/>
+                    </a:lnB>
+                  </a:tcPr>
+                </a:tc>
+                <a:tc>
+                  <a:txBody>
+                    <a:bodyPr/>
+                    <a:lstStyle/>
+                    <a:p>
+                      <a:pPr algn="l"/>
+                      <a:r>
+                        <a:rPr lang="zh-CN" altLang="en-US" sz="1400">
+                          <a:effectLst/>
+                        </a:rPr>
+                        <a:t>✅</a:t>
+                      </a:r>
+                    </a:p>
+                  </a:txBody>
+                  <a:tcPr marL="7138" marR="7138" marT="7138" marB="7138" anchor="ctr">
+                    <a:lnL w="4763" cap="flat" cmpd="sng" algn="ctr">
+                      <a:solidFill>
+                        <a:srgbClr val="CCCCCC"/>
+                      </a:solidFill>
+                      <a:prstDash val="solid"/>
+                      <a:round/>
+                      <a:headEnd type="none" w="med" len="med"/>
+                      <a:tailEnd type="none" w="med" len="med"/>
+                    </a:lnL>
+                    <a:lnR w="4763" cap="flat" cmpd="sng" algn="ctr">
+                      <a:solidFill>
+                        <a:srgbClr val="CCCCCC"/>
+                      </a:solidFill>
+                      <a:prstDash val="solid"/>
+                      <a:round/>
+                      <a:headEnd type="none" w="med" len="med"/>
+                      <a:tailEnd type="none" w="med" len="med"/>
+                    </a:lnR>
+                    <a:lnT w="4763" cap="flat" cmpd="sng" algn="ctr">
+                      <a:solidFill>
+                        <a:srgbClr val="CCCCCC"/>
+                      </a:solidFill>
+                      <a:prstDash val="solid"/>
+                      <a:round/>
+                      <a:headEnd type="none" w="med" len="med"/>
+                      <a:tailEnd type="none" w="med" len="med"/>
+                    </a:lnT>
+                    <a:lnB w="4763" cap="flat" cmpd="sng" algn="ctr">
+                      <a:solidFill>
+                        <a:srgbClr val="CCCCCC"/>
+                      </a:solidFill>
+                      <a:prstDash val="solid"/>
+                      <a:round/>
+                      <a:headEnd type="none" w="med" len="med"/>
+                      <a:tailEnd type="none" w="med" len="med"/>
+                    </a:lnB>
+                  </a:tcPr>
+                </a:tc>
+                <a:tc>
+                  <a:txBody>
+                    <a:bodyPr/>
+                    <a:lstStyle/>
+                    <a:p>
+                      <a:pPr algn="l"/>
+                      <a:r>
+                        <a:rPr lang="zh-CN" altLang="en-US" sz="1400">
+                          <a:effectLst/>
+                        </a:rPr>
+                        <a:t>极快</a:t>
+                      </a:r>
+                    </a:p>
+                  </a:txBody>
+                  <a:tcPr marL="7138" marR="7138" marT="7138" marB="7138" anchor="ctr">
+                    <a:lnL w="4763" cap="flat" cmpd="sng" algn="ctr">
+                      <a:solidFill>
+                        <a:srgbClr val="CCCCCC"/>
+                      </a:solidFill>
+                      <a:prstDash val="solid"/>
+                      <a:round/>
+                      <a:headEnd type="none" w="med" len="med"/>
+                      <a:tailEnd type="none" w="med" len="med"/>
+                    </a:lnL>
+                    <a:lnR w="4763" cap="flat" cmpd="sng" algn="ctr">
+                      <a:solidFill>
+                        <a:srgbClr val="CCCCCC"/>
+                      </a:solidFill>
+                      <a:prstDash val="solid"/>
+                      <a:round/>
+                      <a:headEnd type="none" w="med" len="med"/>
+                      <a:tailEnd type="none" w="med" len="med"/>
+                    </a:lnR>
+                    <a:lnT w="4763" cap="flat" cmpd="sng" algn="ctr">
+                      <a:solidFill>
+                        <a:srgbClr val="CCCCCC"/>
+                      </a:solidFill>
+                      <a:prstDash val="solid"/>
+                      <a:round/>
+                      <a:headEnd type="none" w="med" len="med"/>
+                      <a:tailEnd type="none" w="med" len="med"/>
+                    </a:lnT>
+                    <a:lnB w="4763" cap="flat" cmpd="sng" algn="ctr">
+                      <a:solidFill>
+                        <a:srgbClr val="CCCCCC"/>
+                      </a:solidFill>
+                      <a:prstDash val="solid"/>
+                      <a:round/>
+                      <a:headEnd type="none" w="med" len="med"/>
+                      <a:tailEnd type="none" w="med" len="med"/>
+                    </a:lnB>
+                  </a:tcPr>
+                </a:tc>
+                <a:tc>
+                  <a:txBody>
+                    <a:bodyPr/>
+                    <a:lstStyle/>
+                    <a:p>
+                      <a:pPr algn="l"/>
+                      <a:r>
+                        <a:rPr lang="zh-CN" altLang="en-US" sz="1400">
+                          <a:effectLst/>
+                        </a:rPr>
+                        <a:t>❌（测试域名）</a:t>
+                      </a:r>
+                    </a:p>
+                  </a:txBody>
+                  <a:tcPr marL="7138" marR="7138" marT="7138" marB="7138" anchor="ctr">
+                    <a:lnL w="4763" cap="flat" cmpd="sng" algn="ctr">
+                      <a:solidFill>
+                        <a:srgbClr val="CCCCCC"/>
+                      </a:solidFill>
+                      <a:prstDash val="solid"/>
+                      <a:round/>
+                      <a:headEnd type="none" w="med" len="med"/>
+                      <a:tailEnd type="none" w="med" len="med"/>
+                    </a:lnL>
+                    <a:lnR w="4763" cap="flat" cmpd="sng" algn="ctr">
+                      <a:solidFill>
+                        <a:srgbClr val="CCCCCC"/>
+                      </a:solidFill>
+                      <a:prstDash val="solid"/>
+                      <a:round/>
+                      <a:headEnd type="none" w="med" len="med"/>
+                      <a:tailEnd type="none" w="med" len="med"/>
+                    </a:lnR>
+                    <a:lnT w="4763" cap="flat" cmpd="sng" algn="ctr">
+                      <a:solidFill>
+                        <a:srgbClr val="CCCCCC"/>
+                      </a:solidFill>
+                      <a:prstDash val="solid"/>
+                      <a:round/>
+                      <a:headEnd type="none" w="med" len="med"/>
+                      <a:tailEnd type="none" w="med" len="med"/>
+                    </a:lnT>
+                    <a:lnB w="4763" cap="flat" cmpd="sng" algn="ctr">
+                      <a:solidFill>
+                        <a:srgbClr val="CCCCCC"/>
+                      </a:solidFill>
+                      <a:prstDash val="solid"/>
+                      <a:round/>
+                      <a:headEnd type="none" w="med" len="med"/>
+                      <a:tailEnd type="none" w="med" len="med"/>
+                    </a:lnB>
+                  </a:tcPr>
+                </a:tc>
+                <a:tc>
+                  <a:txBody>
+                    <a:bodyPr/>
+                    <a:lstStyle/>
+                    <a:p>
+                      <a:pPr algn="l"/>
+                      <a:r>
+                        <a:rPr lang="zh-CN" altLang="en-US" sz="1400">
+                          <a:effectLst/>
+                        </a:rPr>
+                        <a:t>✅</a:t>
+                      </a:r>
+                    </a:p>
+                  </a:txBody>
+                  <a:tcPr marL="7138" marR="7138" marT="7138" marB="7138" anchor="ctr">
+                    <a:lnL w="4763" cap="flat" cmpd="sng" algn="ctr">
+                      <a:solidFill>
+                        <a:srgbClr val="CCCCCC"/>
+                      </a:solidFill>
+                      <a:prstDash val="solid"/>
+                      <a:round/>
+                      <a:headEnd type="none" w="med" len="med"/>
+                      <a:tailEnd type="none" w="med" len="med"/>
+                    </a:lnL>
+                    <a:lnR w="4763" cap="flat" cmpd="sng" algn="ctr">
+                      <a:solidFill>
+                        <a:srgbClr val="CCCCCC"/>
+                      </a:solidFill>
+                      <a:prstDash val="solid"/>
+                      <a:round/>
+                      <a:headEnd type="none" w="med" len="med"/>
+                      <a:tailEnd type="none" w="med" len="med"/>
+                    </a:lnR>
+                    <a:lnT w="4763" cap="flat" cmpd="sng" algn="ctr">
+                      <a:solidFill>
+                        <a:srgbClr val="CCCCCC"/>
+                      </a:solidFill>
+                      <a:prstDash val="solid"/>
+                      <a:round/>
+                      <a:headEnd type="none" w="med" len="med"/>
+                      <a:tailEnd type="none" w="med" len="med"/>
+                    </a:lnT>
+                    <a:lnB w="4763" cap="flat" cmpd="sng" algn="ctr">
+                      <a:solidFill>
+                        <a:srgbClr val="CCCCCC"/>
+                      </a:solidFill>
+                      <a:prstDash val="solid"/>
+                      <a:round/>
+                      <a:headEnd type="none" w="med" len="med"/>
+                      <a:tailEnd type="none" w="med" len="med"/>
+                    </a:lnB>
+                  </a:tcPr>
+                </a:tc>
+                <a:tc>
+                  <a:txBody>
+                    <a:bodyPr/>
+                    <a:lstStyle/>
+                    <a:p>
+                      <a:pPr algn="l"/>
+                      <a:r>
+                        <a:rPr lang="zh-CN" altLang="en-US" sz="1400">
+                          <a:effectLst/>
+                        </a:rPr>
+                        <a:t>需搭配腾讯云 </a:t>
+                      </a:r>
+                      <a:r>
+                        <a:rPr lang="en-US" altLang="zh-CN" sz="1400">
+                          <a:effectLst/>
+                        </a:rPr>
+                        <a:t>DB</a:t>
+                      </a:r>
+                    </a:p>
+                  </a:txBody>
+                  <a:tcPr marL="7138" marR="7138" marT="7138" marB="7138" anchor="ctr">
+                    <a:lnL w="4763" cap="flat" cmpd="sng" algn="ctr">
+                      <a:solidFill>
+                        <a:srgbClr val="CCCCCC"/>
+                      </a:solidFill>
+                      <a:prstDash val="solid"/>
+                      <a:round/>
+                      <a:headEnd type="none" w="med" len="med"/>
+                      <a:tailEnd type="none" w="med" len="med"/>
+                    </a:lnL>
+                    <a:lnR w="4763" cap="flat" cmpd="sng" algn="ctr">
+                      <a:solidFill>
+                        <a:srgbClr val="CCCCCC"/>
+                      </a:solidFill>
+                      <a:prstDash val="solid"/>
+                      <a:round/>
+                      <a:headEnd type="none" w="med" len="med"/>
+                      <a:tailEnd type="none" w="med" len="med"/>
+                    </a:lnR>
+                    <a:lnT w="4763" cap="flat" cmpd="sng" algn="ctr">
+                      <a:solidFill>
+                        <a:srgbClr val="CCCCCC"/>
+                      </a:solidFill>
+                      <a:prstDash val="solid"/>
+                      <a:round/>
+                      <a:headEnd type="none" w="med" len="med"/>
+                      <a:tailEnd type="none" w="med" len="med"/>
+                    </a:lnT>
+                    <a:lnB w="4763" cap="flat" cmpd="sng" algn="ctr">
+                      <a:solidFill>
+                        <a:srgbClr val="CCCCCC"/>
+                      </a:solidFill>
+                      <a:prstDash val="solid"/>
+                      <a:round/>
+                      <a:headEnd type="none" w="med" len="med"/>
+                      <a:tailEnd type="none" w="med" len="med"/>
+                    </a:lnB>
+                  </a:tcPr>
+                </a:tc>
+                <a:tc>
+                  <a:txBody>
+                    <a:bodyPr/>
+                    <a:lstStyle/>
+                    <a:p>
+                      <a:pPr algn="l"/>
+                      <a:r>
+                        <a:rPr lang="zh-CN" altLang="en-US" sz="1400">
+                          <a:effectLst/>
+                        </a:rPr>
+                        <a:t>国内商用官网、生产项目</a:t>
+                      </a:r>
+                    </a:p>
+                  </a:txBody>
+                  <a:tcPr marL="7138" marR="7138" marT="7138" marB="7138" anchor="ctr">
+                    <a:lnL w="4763" cap="flat" cmpd="sng" algn="ctr">
+                      <a:solidFill>
+                        <a:srgbClr val="CCCCCC"/>
+                      </a:solidFill>
+                      <a:prstDash val="solid"/>
+                      <a:round/>
+                      <a:headEnd type="none" w="med" len="med"/>
+                      <a:tailEnd type="none" w="med" len="med"/>
+                    </a:lnL>
+                    <a:lnR w="4763" cap="flat" cmpd="sng" algn="ctr">
+                      <a:solidFill>
+                        <a:srgbClr val="CCCCCC"/>
+                      </a:solidFill>
+                      <a:prstDash val="solid"/>
+                      <a:round/>
+                      <a:headEnd type="none" w="med" len="med"/>
+                      <a:tailEnd type="none" w="med" len="med"/>
+                    </a:lnR>
+                    <a:lnT w="4763" cap="flat" cmpd="sng" algn="ctr">
+                      <a:solidFill>
+                        <a:srgbClr val="CCCCCC"/>
+                      </a:solidFill>
+                      <a:prstDash val="solid"/>
+                      <a:round/>
+                      <a:headEnd type="none" w="med" len="med"/>
+                      <a:tailEnd type="none" w="med" len="med"/>
+                    </a:lnT>
+                    <a:lnB w="4763" cap="flat" cmpd="sng" algn="ctr">
+                      <a:solidFill>
+                        <a:srgbClr val="CCCCCC"/>
+                      </a:solidFill>
+                      <a:prstDash val="solid"/>
+                      <a:round/>
+                      <a:headEnd type="none" w="med" len="med"/>
+                      <a:tailEnd type="none" w="med" len="med"/>
+                    </a:lnB>
+                  </a:tcPr>
+                </a:tc>
+                <a:extLst>
+                  <a:ext uri="{0D108BD9-81ED-4DB2-BD59-A6C34878D82A}">
+                    <a16:rowId xmlns:a16="http://schemas.microsoft.com/office/drawing/2014/main" val="2668347924"/>
+                  </a:ext>
+                </a:extLst>
+              </a:tr>
+              <a:tr h="528214">
+                <a:tc>
+                  <a:txBody>
+                    <a:bodyPr/>
+                    <a:lstStyle/>
+                    <a:p>
+                      <a:pPr algn="l"/>
+                      <a:r>
+                        <a:rPr lang="en-US" sz="1400">
+                          <a:effectLst/>
+                        </a:rPr>
+                        <a:t>CloudBase</a:t>
+                      </a:r>
+                    </a:p>
+                  </a:txBody>
+                  <a:tcPr marL="7138" marR="7138" marT="7138" marB="7138" anchor="ctr">
+                    <a:lnL w="4763" cap="flat" cmpd="sng" algn="ctr">
+                      <a:solidFill>
+                        <a:srgbClr val="CCCCCC"/>
+                      </a:solidFill>
+                      <a:prstDash val="solid"/>
+                      <a:round/>
+                      <a:headEnd type="none" w="med" len="med"/>
+                      <a:tailEnd type="none" w="med" len="med"/>
+                    </a:lnL>
+                    <a:lnR w="4763" cap="flat" cmpd="sng" algn="ctr">
+                      <a:solidFill>
+                        <a:srgbClr val="CCCCCC"/>
+                      </a:solidFill>
+                      <a:prstDash val="solid"/>
+                      <a:round/>
+                      <a:headEnd type="none" w="med" len="med"/>
+                      <a:tailEnd type="none" w="med" len="med"/>
+                    </a:lnR>
+                    <a:lnT w="4763" cap="flat" cmpd="sng" algn="ctr">
+                      <a:solidFill>
+                        <a:srgbClr val="CCCCCC"/>
+                      </a:solidFill>
+                      <a:prstDash val="solid"/>
+                      <a:round/>
+                      <a:headEnd type="none" w="med" len="med"/>
+                      <a:tailEnd type="none" w="med" len="med"/>
+                    </a:lnT>
+                    <a:lnB w="4763" cap="flat" cmpd="sng" algn="ctr">
+                      <a:solidFill>
+                        <a:srgbClr val="CCCCCC"/>
+                      </a:solidFill>
+                      <a:prstDash val="solid"/>
+                      <a:round/>
+                      <a:headEnd type="none" w="med" len="med"/>
+                      <a:tailEnd type="none" w="med" len="med"/>
+                    </a:lnB>
+                  </a:tcPr>
+                </a:tc>
+                <a:tc>
+                  <a:txBody>
+                    <a:bodyPr/>
+                    <a:lstStyle/>
+                    <a:p>
+                      <a:pPr algn="l"/>
+                      <a:r>
+                        <a:rPr lang="zh-CN" altLang="en-US" sz="1400">
+                          <a:effectLst/>
+                        </a:rPr>
+                        <a:t>✅</a:t>
+                      </a:r>
+                    </a:p>
+                  </a:txBody>
+                  <a:tcPr marL="7138" marR="7138" marT="7138" marB="7138" anchor="ctr">
+                    <a:lnL w="4763" cap="flat" cmpd="sng" algn="ctr">
+                      <a:solidFill>
+                        <a:srgbClr val="CCCCCC"/>
+                      </a:solidFill>
+                      <a:prstDash val="solid"/>
+                      <a:round/>
+                      <a:headEnd type="none" w="med" len="med"/>
+                      <a:tailEnd type="none" w="med" len="med"/>
+                    </a:lnL>
+                    <a:lnR w="4763" cap="flat" cmpd="sng" algn="ctr">
+                      <a:solidFill>
+                        <a:srgbClr val="CCCCCC"/>
+                      </a:solidFill>
+                      <a:prstDash val="solid"/>
+                      <a:round/>
+                      <a:headEnd type="none" w="med" len="med"/>
+                      <a:tailEnd type="none" w="med" len="med"/>
+                    </a:lnR>
+                    <a:lnT w="4763" cap="flat" cmpd="sng" algn="ctr">
+                      <a:solidFill>
+                        <a:srgbClr val="CCCCCC"/>
+                      </a:solidFill>
+                      <a:prstDash val="solid"/>
+                      <a:round/>
+                      <a:headEnd type="none" w="med" len="med"/>
+                      <a:tailEnd type="none" w="med" len="med"/>
+                    </a:lnT>
+                    <a:lnB w="4763" cap="flat" cmpd="sng" algn="ctr">
+                      <a:solidFill>
+                        <a:srgbClr val="CCCCCC"/>
+                      </a:solidFill>
+                      <a:prstDash val="solid"/>
+                      <a:round/>
+                      <a:headEnd type="none" w="med" len="med"/>
+                      <a:tailEnd type="none" w="med" len="med"/>
+                    </a:lnB>
+                  </a:tcPr>
+                </a:tc>
+                <a:tc>
+                  <a:txBody>
+                    <a:bodyPr/>
+                    <a:lstStyle/>
+                    <a:p>
+                      <a:pPr algn="l"/>
+                      <a:r>
+                        <a:rPr lang="zh-CN" altLang="en-US" sz="1400">
+                          <a:effectLst/>
+                        </a:rPr>
+                        <a:t>极快</a:t>
+                      </a:r>
+                    </a:p>
+                  </a:txBody>
+                  <a:tcPr marL="7138" marR="7138" marT="7138" marB="7138" anchor="ctr">
+                    <a:lnL w="4763" cap="flat" cmpd="sng" algn="ctr">
+                      <a:solidFill>
+                        <a:srgbClr val="CCCCCC"/>
+                      </a:solidFill>
+                      <a:prstDash val="solid"/>
+                      <a:round/>
+                      <a:headEnd type="none" w="med" len="med"/>
+                      <a:tailEnd type="none" w="med" len="med"/>
+                    </a:lnL>
+                    <a:lnR w="4763" cap="flat" cmpd="sng" algn="ctr">
+                      <a:solidFill>
+                        <a:srgbClr val="CCCCCC"/>
+                      </a:solidFill>
+                      <a:prstDash val="solid"/>
+                      <a:round/>
+                      <a:headEnd type="none" w="med" len="med"/>
+                      <a:tailEnd type="none" w="med" len="med"/>
+                    </a:lnR>
+                    <a:lnT w="4763" cap="flat" cmpd="sng" algn="ctr">
+                      <a:solidFill>
+                        <a:srgbClr val="CCCCCC"/>
+                      </a:solidFill>
+                      <a:prstDash val="solid"/>
+                      <a:round/>
+                      <a:headEnd type="none" w="med" len="med"/>
+                      <a:tailEnd type="none" w="med" len="med"/>
+                    </a:lnT>
+                    <a:lnB w="4763" cap="flat" cmpd="sng" algn="ctr">
+                      <a:solidFill>
+                        <a:srgbClr val="CCCCCC"/>
+                      </a:solidFill>
+                      <a:prstDash val="solid"/>
+                      <a:round/>
+                      <a:headEnd type="none" w="med" len="med"/>
+                      <a:tailEnd type="none" w="med" len="med"/>
+                    </a:lnB>
+                  </a:tcPr>
+                </a:tc>
+                <a:tc>
+                  <a:txBody>
+                    <a:bodyPr/>
+                    <a:lstStyle/>
+                    <a:p>
+                      <a:pPr algn="l"/>
+                      <a:r>
+                        <a:rPr lang="zh-CN" altLang="en-US" sz="1400">
+                          <a:effectLst/>
+                        </a:rPr>
+                        <a:t>❌</a:t>
+                      </a:r>
+                    </a:p>
+                  </a:txBody>
+                  <a:tcPr marL="7138" marR="7138" marT="7138" marB="7138" anchor="ctr">
+                    <a:lnL w="4763" cap="flat" cmpd="sng" algn="ctr">
+                      <a:solidFill>
+                        <a:srgbClr val="CCCCCC"/>
+                      </a:solidFill>
+                      <a:prstDash val="solid"/>
+                      <a:round/>
+                      <a:headEnd type="none" w="med" len="med"/>
+                      <a:tailEnd type="none" w="med" len="med"/>
+                    </a:lnL>
+                    <a:lnR w="4763" cap="flat" cmpd="sng" algn="ctr">
+                      <a:solidFill>
+                        <a:srgbClr val="CCCCCC"/>
+                      </a:solidFill>
+                      <a:prstDash val="solid"/>
+                      <a:round/>
+                      <a:headEnd type="none" w="med" len="med"/>
+                      <a:tailEnd type="none" w="med" len="med"/>
+                    </a:lnR>
+                    <a:lnT w="4763" cap="flat" cmpd="sng" algn="ctr">
+                      <a:solidFill>
+                        <a:srgbClr val="CCCCCC"/>
+                      </a:solidFill>
+                      <a:prstDash val="solid"/>
+                      <a:round/>
+                      <a:headEnd type="none" w="med" len="med"/>
+                      <a:tailEnd type="none" w="med" len="med"/>
+                    </a:lnT>
+                    <a:lnB w="4763" cap="flat" cmpd="sng" algn="ctr">
+                      <a:solidFill>
+                        <a:srgbClr val="CCCCCC"/>
+                      </a:solidFill>
+                      <a:prstDash val="solid"/>
+                      <a:round/>
+                      <a:headEnd type="none" w="med" len="med"/>
+                      <a:tailEnd type="none" w="med" len="med"/>
+                    </a:lnB>
+                  </a:tcPr>
+                </a:tc>
+                <a:tc>
+                  <a:txBody>
+                    <a:bodyPr/>
+                    <a:lstStyle/>
+                    <a:p>
+                      <a:pPr algn="l"/>
+                      <a:r>
+                        <a:rPr lang="zh-CN" altLang="en-US" sz="1400">
+                          <a:effectLst/>
+                        </a:rPr>
+                        <a:t>✅</a:t>
+                      </a:r>
+                    </a:p>
+                  </a:txBody>
+                  <a:tcPr marL="7138" marR="7138" marT="7138" marB="7138" anchor="ctr">
+                    <a:lnL w="4763" cap="flat" cmpd="sng" algn="ctr">
+                      <a:solidFill>
+                        <a:srgbClr val="CCCCCC"/>
+                      </a:solidFill>
+                      <a:prstDash val="solid"/>
+                      <a:round/>
+                      <a:headEnd type="none" w="med" len="med"/>
+                      <a:tailEnd type="none" w="med" len="med"/>
+                    </a:lnL>
+                    <a:lnR w="4763" cap="flat" cmpd="sng" algn="ctr">
+                      <a:solidFill>
+                        <a:srgbClr val="CCCCCC"/>
+                      </a:solidFill>
+                      <a:prstDash val="solid"/>
+                      <a:round/>
+                      <a:headEnd type="none" w="med" len="med"/>
+                      <a:tailEnd type="none" w="med" len="med"/>
+                    </a:lnR>
+                    <a:lnT w="4763" cap="flat" cmpd="sng" algn="ctr">
+                      <a:solidFill>
+                        <a:srgbClr val="CCCCCC"/>
+                      </a:solidFill>
+                      <a:prstDash val="solid"/>
+                      <a:round/>
+                      <a:headEnd type="none" w="med" len="med"/>
+                      <a:tailEnd type="none" w="med" len="med"/>
+                    </a:lnT>
+                    <a:lnB w="4763" cap="flat" cmpd="sng" algn="ctr">
+                      <a:solidFill>
+                        <a:srgbClr val="CCCCCC"/>
+                      </a:solidFill>
+                      <a:prstDash val="solid"/>
+                      <a:round/>
+                      <a:headEnd type="none" w="med" len="med"/>
+                      <a:tailEnd type="none" w="med" len="med"/>
+                    </a:lnB>
+                  </a:tcPr>
+                </a:tc>
+                <a:tc>
+                  <a:txBody>
+                    <a:bodyPr/>
+                    <a:lstStyle/>
+                    <a:p>
+                      <a:pPr algn="l"/>
+                      <a:r>
+                        <a:rPr lang="zh-CN" altLang="en-US" sz="1400">
+                          <a:effectLst/>
+                        </a:rPr>
+                        <a:t>✅ 内置云数据库</a:t>
+                      </a:r>
+                    </a:p>
+                  </a:txBody>
+                  <a:tcPr marL="7138" marR="7138" marT="7138" marB="7138" anchor="ctr">
+                    <a:lnL w="4763" cap="flat" cmpd="sng" algn="ctr">
+                      <a:solidFill>
+                        <a:srgbClr val="CCCCCC"/>
+                      </a:solidFill>
+                      <a:prstDash val="solid"/>
+                      <a:round/>
+                      <a:headEnd type="none" w="med" len="med"/>
+                      <a:tailEnd type="none" w="med" len="med"/>
+                    </a:lnL>
+                    <a:lnR w="4763" cap="flat" cmpd="sng" algn="ctr">
+                      <a:solidFill>
+                        <a:srgbClr val="CCCCCC"/>
+                      </a:solidFill>
+                      <a:prstDash val="solid"/>
+                      <a:round/>
+                      <a:headEnd type="none" w="med" len="med"/>
+                      <a:tailEnd type="none" w="med" len="med"/>
+                    </a:lnR>
+                    <a:lnT w="4763" cap="flat" cmpd="sng" algn="ctr">
+                      <a:solidFill>
+                        <a:srgbClr val="CCCCCC"/>
+                      </a:solidFill>
+                      <a:prstDash val="solid"/>
+                      <a:round/>
+                      <a:headEnd type="none" w="med" len="med"/>
+                      <a:tailEnd type="none" w="med" len="med"/>
+                    </a:lnT>
+                    <a:lnB w="4763" cap="flat" cmpd="sng" algn="ctr">
+                      <a:solidFill>
+                        <a:srgbClr val="CCCCCC"/>
+                      </a:solidFill>
+                      <a:prstDash val="solid"/>
+                      <a:round/>
+                      <a:headEnd type="none" w="med" len="med"/>
+                      <a:tailEnd type="none" w="med" len="med"/>
+                    </a:lnB>
+                  </a:tcPr>
+                </a:tc>
+                <a:tc>
+                  <a:txBody>
+                    <a:bodyPr/>
+                    <a:lstStyle/>
+                    <a:p>
+                      <a:pPr algn="l"/>
+                      <a:r>
+                        <a:rPr lang="zh-CN" altLang="en-US" sz="1400">
+                          <a:effectLst/>
+                        </a:rPr>
+                        <a:t>小程序、国内全栈业务</a:t>
+                      </a:r>
+                    </a:p>
+                  </a:txBody>
+                  <a:tcPr marL="7138" marR="7138" marT="7138" marB="7138" anchor="ctr">
+                    <a:lnL w="4763" cap="flat" cmpd="sng" algn="ctr">
+                      <a:solidFill>
+                        <a:srgbClr val="CCCCCC"/>
+                      </a:solidFill>
+                      <a:prstDash val="solid"/>
+                      <a:round/>
+                      <a:headEnd type="none" w="med" len="med"/>
+                      <a:tailEnd type="none" w="med" len="med"/>
+                    </a:lnL>
+                    <a:lnR w="4763" cap="flat" cmpd="sng" algn="ctr">
+                      <a:solidFill>
+                        <a:srgbClr val="CCCCCC"/>
+                      </a:solidFill>
+                      <a:prstDash val="solid"/>
+                      <a:round/>
+                      <a:headEnd type="none" w="med" len="med"/>
+                      <a:tailEnd type="none" w="med" len="med"/>
+                    </a:lnR>
+                    <a:lnT w="4763" cap="flat" cmpd="sng" algn="ctr">
+                      <a:solidFill>
+                        <a:srgbClr val="CCCCCC"/>
+                      </a:solidFill>
+                      <a:prstDash val="solid"/>
+                      <a:round/>
+                      <a:headEnd type="none" w="med" len="med"/>
+                      <a:tailEnd type="none" w="med" len="med"/>
+                    </a:lnT>
+                    <a:lnB w="4763" cap="flat" cmpd="sng" algn="ctr">
+                      <a:solidFill>
+                        <a:srgbClr val="CCCCCC"/>
+                      </a:solidFill>
+                      <a:prstDash val="solid"/>
+                      <a:round/>
+                      <a:headEnd type="none" w="med" len="med"/>
+                      <a:tailEnd type="none" w="med" len="med"/>
+                    </a:lnB>
+                  </a:tcPr>
+                </a:tc>
+                <a:extLst>
+                  <a:ext uri="{0D108BD9-81ED-4DB2-BD59-A6C34878D82A}">
+                    <a16:rowId xmlns:a16="http://schemas.microsoft.com/office/drawing/2014/main" val="830370119"/>
+                  </a:ext>
+                </a:extLst>
+              </a:tr>
+              <a:tr h="887970">
+                <a:tc>
+                  <a:txBody>
+                    <a:bodyPr/>
+                    <a:lstStyle/>
+                    <a:p>
+                      <a:pPr algn="l"/>
+                      <a:r>
+                        <a:rPr lang="en-US" sz="1400">
+                          <a:solidFill>
+                            <a:schemeClr val="accent1"/>
+                          </a:solidFill>
+                          <a:effectLst/>
+                        </a:rPr>
+                        <a:t>Zeabur</a:t>
+                      </a:r>
+                    </a:p>
+                  </a:txBody>
+                  <a:tcPr marL="7138" marR="7138" marT="7138" marB="7138" anchor="ctr">
+                    <a:lnL w="4763" cap="flat" cmpd="sng" algn="ctr">
+                      <a:solidFill>
+                        <a:srgbClr val="CCCCCC"/>
+                      </a:solidFill>
+                      <a:prstDash val="solid"/>
+                      <a:round/>
+                      <a:headEnd type="none" w="med" len="med"/>
+                      <a:tailEnd type="none" w="med" len="med"/>
+                    </a:lnL>
+                    <a:lnR w="4763" cap="flat" cmpd="sng" algn="ctr">
+                      <a:solidFill>
+                        <a:srgbClr val="CCCCCC"/>
+                      </a:solidFill>
+                      <a:prstDash val="solid"/>
+                      <a:round/>
+                      <a:headEnd type="none" w="med" len="med"/>
+                      <a:tailEnd type="none" w="med" len="med"/>
+                    </a:lnR>
+                    <a:lnT w="4763" cap="flat" cmpd="sng" algn="ctr">
+                      <a:solidFill>
+                        <a:srgbClr val="CCCCCC"/>
+                      </a:solidFill>
+                      <a:prstDash val="solid"/>
+                      <a:round/>
+                      <a:headEnd type="none" w="med" len="med"/>
+                      <a:tailEnd type="none" w="med" len="med"/>
+                    </a:lnT>
+                    <a:lnB w="4763" cap="flat" cmpd="sng" algn="ctr">
+                      <a:solidFill>
+                        <a:srgbClr val="CCCCCC"/>
+                      </a:solidFill>
+                      <a:prstDash val="solid"/>
+                      <a:round/>
+                      <a:headEnd type="none" w="med" len="med"/>
+                      <a:tailEnd type="none" w="med" len="med"/>
+                    </a:lnB>
+                  </a:tcPr>
+                </a:tc>
+                <a:tc>
+                  <a:txBody>
+                    <a:bodyPr/>
+                    <a:lstStyle/>
+                    <a:p>
+                      <a:pPr algn="l"/>
+                      <a:r>
+                        <a:rPr lang="zh-CN" altLang="en-US" sz="1400">
+                          <a:solidFill>
+                            <a:schemeClr val="accent1"/>
+                          </a:solidFill>
+                          <a:effectLst/>
+                        </a:rPr>
+                        <a:t>✅</a:t>
+                      </a:r>
+                    </a:p>
+                  </a:txBody>
+                  <a:tcPr marL="7138" marR="7138" marT="7138" marB="7138" anchor="ctr">
+                    <a:lnL w="4763" cap="flat" cmpd="sng" algn="ctr">
+                      <a:solidFill>
+                        <a:srgbClr val="CCCCCC"/>
+                      </a:solidFill>
+                      <a:prstDash val="solid"/>
+                      <a:round/>
+                      <a:headEnd type="none" w="med" len="med"/>
+                      <a:tailEnd type="none" w="med" len="med"/>
+                    </a:lnL>
+                    <a:lnR w="4763" cap="flat" cmpd="sng" algn="ctr">
+                      <a:solidFill>
+                        <a:srgbClr val="CCCCCC"/>
+                      </a:solidFill>
+                      <a:prstDash val="solid"/>
+                      <a:round/>
+                      <a:headEnd type="none" w="med" len="med"/>
+                      <a:tailEnd type="none" w="med" len="med"/>
+                    </a:lnR>
+                    <a:lnT w="4763" cap="flat" cmpd="sng" algn="ctr">
+                      <a:solidFill>
+                        <a:srgbClr val="CCCCCC"/>
+                      </a:solidFill>
+                      <a:prstDash val="solid"/>
+                      <a:round/>
+                      <a:headEnd type="none" w="med" len="med"/>
+                      <a:tailEnd type="none" w="med" len="med"/>
+                    </a:lnT>
+                    <a:lnB w="4763" cap="flat" cmpd="sng" algn="ctr">
+                      <a:solidFill>
+                        <a:srgbClr val="CCCCCC"/>
+                      </a:solidFill>
+                      <a:prstDash val="solid"/>
+                      <a:round/>
+                      <a:headEnd type="none" w="med" len="med"/>
+                      <a:tailEnd type="none" w="med" len="med"/>
+                    </a:lnB>
+                  </a:tcPr>
+                </a:tc>
+                <a:tc>
+                  <a:txBody>
+                    <a:bodyPr/>
+                    <a:lstStyle/>
+                    <a:p>
+                      <a:pPr algn="l"/>
+                      <a:r>
+                        <a:rPr lang="zh-CN" altLang="en-US" sz="1400">
+                          <a:solidFill>
+                            <a:schemeClr val="accent1"/>
+                          </a:solidFill>
+                          <a:effectLst/>
+                        </a:rPr>
+                        <a:t>良好</a:t>
+                      </a:r>
+                    </a:p>
+                  </a:txBody>
+                  <a:tcPr marL="7138" marR="7138" marT="7138" marB="7138" anchor="ctr">
+                    <a:lnL w="4763" cap="flat" cmpd="sng" algn="ctr">
+                      <a:solidFill>
+                        <a:srgbClr val="CCCCCC"/>
+                      </a:solidFill>
+                      <a:prstDash val="solid"/>
+                      <a:round/>
+                      <a:headEnd type="none" w="med" len="med"/>
+                      <a:tailEnd type="none" w="med" len="med"/>
+                    </a:lnL>
+                    <a:lnR w="4763" cap="flat" cmpd="sng" algn="ctr">
+                      <a:solidFill>
+                        <a:srgbClr val="CCCCCC"/>
+                      </a:solidFill>
+                      <a:prstDash val="solid"/>
+                      <a:round/>
+                      <a:headEnd type="none" w="med" len="med"/>
+                      <a:tailEnd type="none" w="med" len="med"/>
+                    </a:lnR>
+                    <a:lnT w="4763" cap="flat" cmpd="sng" algn="ctr">
+                      <a:solidFill>
+                        <a:srgbClr val="CCCCCC"/>
+                      </a:solidFill>
+                      <a:prstDash val="solid"/>
+                      <a:round/>
+                      <a:headEnd type="none" w="med" len="med"/>
+                      <a:tailEnd type="none" w="med" len="med"/>
+                    </a:lnT>
+                    <a:lnB w="4763" cap="flat" cmpd="sng" algn="ctr">
+                      <a:solidFill>
+                        <a:srgbClr val="CCCCCC"/>
+                      </a:solidFill>
+                      <a:prstDash val="solid"/>
+                      <a:round/>
+                      <a:headEnd type="none" w="med" len="med"/>
+                      <a:tailEnd type="none" w="med" len="med"/>
+                    </a:lnB>
+                  </a:tcPr>
+                </a:tc>
+                <a:tc>
+                  <a:txBody>
+                    <a:bodyPr/>
+                    <a:lstStyle/>
+                    <a:p>
+                      <a:pPr algn="l"/>
+                      <a:r>
+                        <a:rPr lang="zh-CN" altLang="en-US" sz="1400">
+                          <a:solidFill>
+                            <a:schemeClr val="accent1"/>
+                          </a:solidFill>
+                          <a:effectLst/>
+                        </a:rPr>
+                        <a:t>✅ 自带二级域名</a:t>
+                      </a:r>
+                    </a:p>
+                  </a:txBody>
+                  <a:tcPr marL="7138" marR="7138" marT="7138" marB="7138" anchor="ctr">
+                    <a:lnL w="4763" cap="flat" cmpd="sng" algn="ctr">
+                      <a:solidFill>
+                        <a:srgbClr val="CCCCCC"/>
+                      </a:solidFill>
+                      <a:prstDash val="solid"/>
+                      <a:round/>
+                      <a:headEnd type="none" w="med" len="med"/>
+                      <a:tailEnd type="none" w="med" len="med"/>
+                    </a:lnL>
+                    <a:lnR w="4763" cap="flat" cmpd="sng" algn="ctr">
+                      <a:solidFill>
+                        <a:srgbClr val="CCCCCC"/>
+                      </a:solidFill>
+                      <a:prstDash val="solid"/>
+                      <a:round/>
+                      <a:headEnd type="none" w="med" len="med"/>
+                      <a:tailEnd type="none" w="med" len="med"/>
+                    </a:lnR>
+                    <a:lnT w="4763" cap="flat" cmpd="sng" algn="ctr">
+                      <a:solidFill>
+                        <a:srgbClr val="CCCCCC"/>
+                      </a:solidFill>
+                      <a:prstDash val="solid"/>
+                      <a:round/>
+                      <a:headEnd type="none" w="med" len="med"/>
+                      <a:tailEnd type="none" w="med" len="med"/>
+                    </a:lnT>
+                    <a:lnB w="4763" cap="flat" cmpd="sng" algn="ctr">
+                      <a:solidFill>
+                        <a:srgbClr val="CCCCCC"/>
+                      </a:solidFill>
+                      <a:prstDash val="solid"/>
+                      <a:round/>
+                      <a:headEnd type="none" w="med" len="med"/>
+                      <a:tailEnd type="none" w="med" len="med"/>
+                    </a:lnB>
+                  </a:tcPr>
+                </a:tc>
+                <a:tc>
+                  <a:txBody>
+                    <a:bodyPr/>
+                    <a:lstStyle/>
+                    <a:p>
+                      <a:pPr algn="l"/>
+                      <a:r>
+                        <a:rPr lang="zh-CN" altLang="en-US" sz="1400">
+                          <a:solidFill>
+                            <a:schemeClr val="accent1"/>
+                          </a:solidFill>
+                          <a:effectLst/>
+                        </a:rPr>
+                        <a:t>✅</a:t>
+                      </a:r>
+                    </a:p>
+                  </a:txBody>
+                  <a:tcPr marL="7138" marR="7138" marT="7138" marB="7138" anchor="ctr">
+                    <a:lnL w="4763" cap="flat" cmpd="sng" algn="ctr">
+                      <a:solidFill>
+                        <a:srgbClr val="CCCCCC"/>
+                      </a:solidFill>
+                      <a:prstDash val="solid"/>
+                      <a:round/>
+                      <a:headEnd type="none" w="med" len="med"/>
+                      <a:tailEnd type="none" w="med" len="med"/>
+                    </a:lnL>
+                    <a:lnR w="4763" cap="flat" cmpd="sng" algn="ctr">
+                      <a:solidFill>
+                        <a:srgbClr val="CCCCCC"/>
+                      </a:solidFill>
+                      <a:prstDash val="solid"/>
+                      <a:round/>
+                      <a:headEnd type="none" w="med" len="med"/>
+                      <a:tailEnd type="none" w="med" len="med"/>
+                    </a:lnR>
+                    <a:lnT w="4763" cap="flat" cmpd="sng" algn="ctr">
+                      <a:solidFill>
+                        <a:srgbClr val="CCCCCC"/>
+                      </a:solidFill>
+                      <a:prstDash val="solid"/>
+                      <a:round/>
+                      <a:headEnd type="none" w="med" len="med"/>
+                      <a:tailEnd type="none" w="med" len="med"/>
+                    </a:lnT>
+                    <a:lnB w="4763" cap="flat" cmpd="sng" algn="ctr">
+                      <a:solidFill>
+                        <a:srgbClr val="CCCCCC"/>
+                      </a:solidFill>
+                      <a:prstDash val="solid"/>
+                      <a:round/>
+                      <a:headEnd type="none" w="med" len="med"/>
+                      <a:tailEnd type="none" w="med" len="med"/>
+                    </a:lnB>
+                  </a:tcPr>
+                </a:tc>
+                <a:tc>
+                  <a:txBody>
+                    <a:bodyPr/>
+                    <a:lstStyle/>
+                    <a:p>
+                      <a:pPr algn="l"/>
+                      <a:r>
+                        <a:rPr lang="zh-CN" altLang="en-US" sz="1400">
+                          <a:solidFill>
+                            <a:schemeClr val="accent1"/>
+                          </a:solidFill>
+                          <a:effectLst/>
+                        </a:rPr>
+                        <a:t>✅ 托管数据库</a:t>
+                      </a:r>
+                    </a:p>
+                  </a:txBody>
+                  <a:tcPr marL="7138" marR="7138" marT="7138" marB="7138" anchor="ctr">
+                    <a:lnL w="4763" cap="flat" cmpd="sng" algn="ctr">
+                      <a:solidFill>
+                        <a:srgbClr val="CCCCCC"/>
+                      </a:solidFill>
+                      <a:prstDash val="solid"/>
+                      <a:round/>
+                      <a:headEnd type="none" w="med" len="med"/>
+                      <a:tailEnd type="none" w="med" len="med"/>
+                    </a:lnL>
+                    <a:lnR w="4763" cap="flat" cmpd="sng" algn="ctr">
+                      <a:solidFill>
+                        <a:srgbClr val="CCCCCC"/>
+                      </a:solidFill>
+                      <a:prstDash val="solid"/>
+                      <a:round/>
+                      <a:headEnd type="none" w="med" len="med"/>
+                      <a:tailEnd type="none" w="med" len="med"/>
+                    </a:lnR>
+                    <a:lnT w="4763" cap="flat" cmpd="sng" algn="ctr">
+                      <a:solidFill>
+                        <a:srgbClr val="CCCCCC"/>
+                      </a:solidFill>
+                      <a:prstDash val="solid"/>
+                      <a:round/>
+                      <a:headEnd type="none" w="med" len="med"/>
+                      <a:tailEnd type="none" w="med" len="med"/>
+                    </a:lnT>
+                    <a:lnB w="4763" cap="flat" cmpd="sng" algn="ctr">
+                      <a:solidFill>
+                        <a:srgbClr val="CCCCCC"/>
+                      </a:solidFill>
+                      <a:prstDash val="solid"/>
+                      <a:round/>
+                      <a:headEnd type="none" w="med" len="med"/>
+                      <a:tailEnd type="none" w="med" len="med"/>
+                    </a:lnB>
+                  </a:tcPr>
+                </a:tc>
+                <a:tc>
+                  <a:txBody>
+                    <a:bodyPr/>
+                    <a:lstStyle/>
+                    <a:p>
+                      <a:pPr algn="l"/>
+                      <a:r>
+                        <a:rPr lang="zh-CN" altLang="en-US" sz="1400" dirty="0">
+                          <a:solidFill>
+                            <a:schemeClr val="accent1"/>
+                          </a:solidFill>
+                          <a:effectLst/>
+                        </a:rPr>
+                        <a:t>个人开发、</a:t>
+                      </a:r>
+                      <a:r>
+                        <a:rPr lang="en-US" altLang="zh-CN" sz="1400" dirty="0">
+                          <a:solidFill>
+                            <a:schemeClr val="accent1"/>
+                          </a:solidFill>
+                          <a:effectLst/>
+                        </a:rPr>
+                        <a:t>Demo</a:t>
+                      </a:r>
+                      <a:r>
+                        <a:rPr lang="zh-CN" altLang="en-US" sz="1400" dirty="0">
+                          <a:solidFill>
+                            <a:schemeClr val="accent1"/>
+                          </a:solidFill>
+                          <a:effectLst/>
+                        </a:rPr>
+                        <a:t>、调试、轻量商用</a:t>
+                      </a:r>
+                    </a:p>
+                  </a:txBody>
+                  <a:tcPr marL="7138" marR="7138" marT="7138" marB="7138" anchor="ctr">
+                    <a:lnL w="4763" cap="flat" cmpd="sng" algn="ctr">
+                      <a:solidFill>
+                        <a:srgbClr val="CCCCCC"/>
+                      </a:solidFill>
+                      <a:prstDash val="solid"/>
+                      <a:round/>
+                      <a:headEnd type="none" w="med" len="med"/>
+                      <a:tailEnd type="none" w="med" len="med"/>
+                    </a:lnL>
+                    <a:lnR w="4763" cap="flat" cmpd="sng" algn="ctr">
+                      <a:solidFill>
+                        <a:srgbClr val="CCCCCC"/>
+                      </a:solidFill>
+                      <a:prstDash val="solid"/>
+                      <a:round/>
+                      <a:headEnd type="none" w="med" len="med"/>
+                      <a:tailEnd type="none" w="med" len="med"/>
+                    </a:lnR>
+                    <a:lnT w="4763" cap="flat" cmpd="sng" algn="ctr">
+                      <a:solidFill>
+                        <a:srgbClr val="CCCCCC"/>
+                      </a:solidFill>
+                      <a:prstDash val="solid"/>
+                      <a:round/>
+                      <a:headEnd type="none" w="med" len="med"/>
+                      <a:tailEnd type="none" w="med" len="med"/>
+                    </a:lnT>
+                    <a:lnB w="4763" cap="flat" cmpd="sng" algn="ctr">
+                      <a:solidFill>
+                        <a:srgbClr val="CCCCCC"/>
+                      </a:solidFill>
+                      <a:prstDash val="solid"/>
+                      <a:round/>
+                      <a:headEnd type="none" w="med" len="med"/>
+                      <a:tailEnd type="none" w="med" len="med"/>
+                    </a:lnB>
+                  </a:tcPr>
+                </a:tc>
+                <a:extLst>
+                  <a:ext uri="{0D108BD9-81ED-4DB2-BD59-A6C34878D82A}">
+                    <a16:rowId xmlns:a16="http://schemas.microsoft.com/office/drawing/2014/main" val="4248076504"/>
+                  </a:ext>
+                </a:extLst>
+              </a:tr>
+              <a:tr h="528214">
+                <a:tc>
+                  <a:txBody>
+                    <a:bodyPr/>
+                    <a:lstStyle/>
+                    <a:p>
+                      <a:pPr algn="l"/>
+                      <a:r>
+                        <a:rPr lang="en-US" sz="1400">
+                          <a:effectLst/>
+                        </a:rPr>
+                        <a:t>Gitee Pages</a:t>
+                      </a:r>
+                    </a:p>
+                  </a:txBody>
+                  <a:tcPr marL="7138" marR="7138" marT="7138" marB="7138" anchor="ctr">
+                    <a:lnL w="4763" cap="flat" cmpd="sng" algn="ctr">
+                      <a:solidFill>
+                        <a:srgbClr val="CCCCCC"/>
+                      </a:solidFill>
+                      <a:prstDash val="solid"/>
+                      <a:round/>
+                      <a:headEnd type="none" w="med" len="med"/>
+                      <a:tailEnd type="none" w="med" len="med"/>
+                    </a:lnL>
+                    <a:lnR w="4763" cap="flat" cmpd="sng" algn="ctr">
+                      <a:solidFill>
+                        <a:srgbClr val="CCCCCC"/>
+                      </a:solidFill>
+                      <a:prstDash val="solid"/>
+                      <a:round/>
+                      <a:headEnd type="none" w="med" len="med"/>
+                      <a:tailEnd type="none" w="med" len="med"/>
+                    </a:lnR>
+                    <a:lnT w="4763" cap="flat" cmpd="sng" algn="ctr">
+                      <a:solidFill>
+                        <a:srgbClr val="CCCCCC"/>
+                      </a:solidFill>
+                      <a:prstDash val="solid"/>
+                      <a:round/>
+                      <a:headEnd type="none" w="med" len="med"/>
+                      <a:tailEnd type="none" w="med" len="med"/>
+                    </a:lnT>
+                    <a:lnB w="4763" cap="flat" cmpd="sng" algn="ctr">
+                      <a:solidFill>
+                        <a:srgbClr val="CCCCCC"/>
+                      </a:solidFill>
+                      <a:prstDash val="solid"/>
+                      <a:round/>
+                      <a:headEnd type="none" w="med" len="med"/>
+                      <a:tailEnd type="none" w="med" len="med"/>
+                    </a:lnB>
+                  </a:tcPr>
+                </a:tc>
+                <a:tc>
+                  <a:txBody>
+                    <a:bodyPr/>
+                    <a:lstStyle/>
+                    <a:p>
+                      <a:pPr algn="l"/>
+                      <a:r>
+                        <a:rPr lang="zh-CN" altLang="en-US" sz="1400">
+                          <a:effectLst/>
+                        </a:rPr>
+                        <a:t>❌ 仅静态</a:t>
+                      </a:r>
+                    </a:p>
+                  </a:txBody>
+                  <a:tcPr marL="7138" marR="7138" marT="7138" marB="7138" anchor="ctr">
+                    <a:lnL w="4763" cap="flat" cmpd="sng" algn="ctr">
+                      <a:solidFill>
+                        <a:srgbClr val="CCCCCC"/>
+                      </a:solidFill>
+                      <a:prstDash val="solid"/>
+                      <a:round/>
+                      <a:headEnd type="none" w="med" len="med"/>
+                      <a:tailEnd type="none" w="med" len="med"/>
+                    </a:lnL>
+                    <a:lnR w="4763" cap="flat" cmpd="sng" algn="ctr">
+                      <a:solidFill>
+                        <a:srgbClr val="CCCCCC"/>
+                      </a:solidFill>
+                      <a:prstDash val="solid"/>
+                      <a:round/>
+                      <a:headEnd type="none" w="med" len="med"/>
+                      <a:tailEnd type="none" w="med" len="med"/>
+                    </a:lnR>
+                    <a:lnT w="4763" cap="flat" cmpd="sng" algn="ctr">
+                      <a:solidFill>
+                        <a:srgbClr val="CCCCCC"/>
+                      </a:solidFill>
+                      <a:prstDash val="solid"/>
+                      <a:round/>
+                      <a:headEnd type="none" w="med" len="med"/>
+                      <a:tailEnd type="none" w="med" len="med"/>
+                    </a:lnT>
+                    <a:lnB w="4763" cap="flat" cmpd="sng" algn="ctr">
+                      <a:solidFill>
+                        <a:srgbClr val="CCCCCC"/>
+                      </a:solidFill>
+                      <a:prstDash val="solid"/>
+                      <a:round/>
+                      <a:headEnd type="none" w="med" len="med"/>
+                      <a:tailEnd type="none" w="med" len="med"/>
+                    </a:lnB>
+                  </a:tcPr>
+                </a:tc>
+                <a:tc>
+                  <a:txBody>
+                    <a:bodyPr/>
+                    <a:lstStyle/>
+                    <a:p>
+                      <a:pPr algn="l"/>
+                      <a:r>
+                        <a:rPr lang="zh-CN" altLang="en-US" sz="1400">
+                          <a:effectLst/>
+                        </a:rPr>
+                        <a:t>快</a:t>
+                      </a:r>
+                    </a:p>
+                  </a:txBody>
+                  <a:tcPr marL="7138" marR="7138" marT="7138" marB="7138" anchor="ctr">
+                    <a:lnL w="4763" cap="flat" cmpd="sng" algn="ctr">
+                      <a:solidFill>
+                        <a:srgbClr val="CCCCCC"/>
+                      </a:solidFill>
+                      <a:prstDash val="solid"/>
+                      <a:round/>
+                      <a:headEnd type="none" w="med" len="med"/>
+                      <a:tailEnd type="none" w="med" len="med"/>
+                    </a:lnL>
+                    <a:lnR w="4763" cap="flat" cmpd="sng" algn="ctr">
+                      <a:solidFill>
+                        <a:srgbClr val="CCCCCC"/>
+                      </a:solidFill>
+                      <a:prstDash val="solid"/>
+                      <a:round/>
+                      <a:headEnd type="none" w="med" len="med"/>
+                      <a:tailEnd type="none" w="med" len="med"/>
+                    </a:lnR>
+                    <a:lnT w="4763" cap="flat" cmpd="sng" algn="ctr">
+                      <a:solidFill>
+                        <a:srgbClr val="CCCCCC"/>
+                      </a:solidFill>
+                      <a:prstDash val="solid"/>
+                      <a:round/>
+                      <a:headEnd type="none" w="med" len="med"/>
+                      <a:tailEnd type="none" w="med" len="med"/>
+                    </a:lnT>
+                    <a:lnB w="4763" cap="flat" cmpd="sng" algn="ctr">
+                      <a:solidFill>
+                        <a:srgbClr val="CCCCCC"/>
+                      </a:solidFill>
+                      <a:prstDash val="solid"/>
+                      <a:round/>
+                      <a:headEnd type="none" w="med" len="med"/>
+                      <a:tailEnd type="none" w="med" len="med"/>
+                    </a:lnB>
+                  </a:tcPr>
+                </a:tc>
+                <a:tc>
+                  <a:txBody>
+                    <a:bodyPr/>
+                    <a:lstStyle/>
+                    <a:p>
+                      <a:pPr algn="l"/>
+                      <a:r>
+                        <a:rPr lang="zh-CN" altLang="en-US" sz="1400">
+                          <a:effectLst/>
+                        </a:rPr>
+                        <a:t>❌</a:t>
+                      </a:r>
+                    </a:p>
+                  </a:txBody>
+                  <a:tcPr marL="7138" marR="7138" marT="7138" marB="7138" anchor="ctr">
+                    <a:lnL w="4763" cap="flat" cmpd="sng" algn="ctr">
+                      <a:solidFill>
+                        <a:srgbClr val="CCCCCC"/>
+                      </a:solidFill>
+                      <a:prstDash val="solid"/>
+                      <a:round/>
+                      <a:headEnd type="none" w="med" len="med"/>
+                      <a:tailEnd type="none" w="med" len="med"/>
+                    </a:lnL>
+                    <a:lnR w="4763" cap="flat" cmpd="sng" algn="ctr">
+                      <a:solidFill>
+                        <a:srgbClr val="CCCCCC"/>
+                      </a:solidFill>
+                      <a:prstDash val="solid"/>
+                      <a:round/>
+                      <a:headEnd type="none" w="med" len="med"/>
+                      <a:tailEnd type="none" w="med" len="med"/>
+                    </a:lnR>
+                    <a:lnT w="4763" cap="flat" cmpd="sng" algn="ctr">
+                      <a:solidFill>
+                        <a:srgbClr val="CCCCCC"/>
+                      </a:solidFill>
+                      <a:prstDash val="solid"/>
+                      <a:round/>
+                      <a:headEnd type="none" w="med" len="med"/>
+                      <a:tailEnd type="none" w="med" len="med"/>
+                    </a:lnT>
+                    <a:lnB w="4763" cap="flat" cmpd="sng" algn="ctr">
+                      <a:solidFill>
+                        <a:srgbClr val="CCCCCC"/>
+                      </a:solidFill>
+                      <a:prstDash val="solid"/>
+                      <a:round/>
+                      <a:headEnd type="none" w="med" len="med"/>
+                      <a:tailEnd type="none" w="med" len="med"/>
+                    </a:lnB>
+                  </a:tcPr>
+                </a:tc>
+                <a:tc>
+                  <a:txBody>
+                    <a:bodyPr/>
+                    <a:lstStyle/>
+                    <a:p>
+                      <a:pPr algn="l"/>
+                      <a:r>
+                        <a:rPr lang="zh-CN" altLang="en-US" sz="1400">
+                          <a:effectLst/>
+                        </a:rPr>
+                        <a:t>❌</a:t>
+                      </a:r>
+                    </a:p>
+                  </a:txBody>
+                  <a:tcPr marL="7138" marR="7138" marT="7138" marB="7138" anchor="ctr">
+                    <a:lnL w="4763" cap="flat" cmpd="sng" algn="ctr">
+                      <a:solidFill>
+                        <a:srgbClr val="CCCCCC"/>
+                      </a:solidFill>
+                      <a:prstDash val="solid"/>
+                      <a:round/>
+                      <a:headEnd type="none" w="med" len="med"/>
+                      <a:tailEnd type="none" w="med" len="med"/>
+                    </a:lnL>
+                    <a:lnR w="4763" cap="flat" cmpd="sng" algn="ctr">
+                      <a:solidFill>
+                        <a:srgbClr val="CCCCCC"/>
+                      </a:solidFill>
+                      <a:prstDash val="solid"/>
+                      <a:round/>
+                      <a:headEnd type="none" w="med" len="med"/>
+                      <a:tailEnd type="none" w="med" len="med"/>
+                    </a:lnR>
+                    <a:lnT w="4763" cap="flat" cmpd="sng" algn="ctr">
+                      <a:solidFill>
+                        <a:srgbClr val="CCCCCC"/>
+                      </a:solidFill>
+                      <a:prstDash val="solid"/>
+                      <a:round/>
+                      <a:headEnd type="none" w="med" len="med"/>
+                      <a:tailEnd type="none" w="med" len="med"/>
+                    </a:lnT>
+                    <a:lnB w="4763" cap="flat" cmpd="sng" algn="ctr">
+                      <a:solidFill>
+                        <a:srgbClr val="CCCCCC"/>
+                      </a:solidFill>
+                      <a:prstDash val="solid"/>
+                      <a:round/>
+                      <a:headEnd type="none" w="med" len="med"/>
+                      <a:tailEnd type="none" w="med" len="med"/>
+                    </a:lnB>
+                  </a:tcPr>
+                </a:tc>
+                <a:tc>
+                  <a:txBody>
+                    <a:bodyPr/>
+                    <a:lstStyle/>
+                    <a:p>
+                      <a:pPr algn="l"/>
+                      <a:r>
+                        <a:rPr lang="zh-CN" altLang="en-US" sz="1400">
+                          <a:effectLst/>
+                        </a:rPr>
+                        <a:t>❌</a:t>
+                      </a:r>
+                    </a:p>
+                  </a:txBody>
+                  <a:tcPr marL="7138" marR="7138" marT="7138" marB="7138" anchor="ctr">
+                    <a:lnL w="4763" cap="flat" cmpd="sng" algn="ctr">
+                      <a:solidFill>
+                        <a:srgbClr val="CCCCCC"/>
+                      </a:solidFill>
+                      <a:prstDash val="solid"/>
+                      <a:round/>
+                      <a:headEnd type="none" w="med" len="med"/>
+                      <a:tailEnd type="none" w="med" len="med"/>
+                    </a:lnL>
+                    <a:lnR w="4763" cap="flat" cmpd="sng" algn="ctr">
+                      <a:solidFill>
+                        <a:srgbClr val="CCCCCC"/>
+                      </a:solidFill>
+                      <a:prstDash val="solid"/>
+                      <a:round/>
+                      <a:headEnd type="none" w="med" len="med"/>
+                      <a:tailEnd type="none" w="med" len="med"/>
+                    </a:lnR>
+                    <a:lnT w="4763" cap="flat" cmpd="sng" algn="ctr">
+                      <a:solidFill>
+                        <a:srgbClr val="CCCCCC"/>
+                      </a:solidFill>
+                      <a:prstDash val="solid"/>
+                      <a:round/>
+                      <a:headEnd type="none" w="med" len="med"/>
+                      <a:tailEnd type="none" w="med" len="med"/>
+                    </a:lnT>
+                    <a:lnB w="4763" cap="flat" cmpd="sng" algn="ctr">
+                      <a:solidFill>
+                        <a:srgbClr val="CCCCCC"/>
+                      </a:solidFill>
+                      <a:prstDash val="solid"/>
+                      <a:round/>
+                      <a:headEnd type="none" w="med" len="med"/>
+                      <a:tailEnd type="none" w="med" len="med"/>
+                    </a:lnB>
+                  </a:tcPr>
+                </a:tc>
+                <a:tc>
+                  <a:txBody>
+                    <a:bodyPr/>
+                    <a:lstStyle/>
+                    <a:p>
+                      <a:pPr algn="l"/>
+                      <a:r>
+                        <a:rPr lang="zh-CN" altLang="en-US" sz="1400" dirty="0">
+                          <a:effectLst/>
+                        </a:rPr>
+                        <a:t>纯静态博客、简历页</a:t>
+                      </a:r>
+                    </a:p>
+                  </a:txBody>
+                  <a:tcPr marL="7138" marR="7138" marT="7138" marB="7138" anchor="ctr">
+                    <a:lnL w="4763" cap="flat" cmpd="sng" algn="ctr">
+                      <a:solidFill>
+                        <a:srgbClr val="CCCCCC"/>
+                      </a:solidFill>
+                      <a:prstDash val="solid"/>
+                      <a:round/>
+                      <a:headEnd type="none" w="med" len="med"/>
+                      <a:tailEnd type="none" w="med" len="med"/>
+                    </a:lnL>
+                    <a:lnR w="4763" cap="flat" cmpd="sng" algn="ctr">
+                      <a:solidFill>
+                        <a:srgbClr val="CCCCCC"/>
+                      </a:solidFill>
+                      <a:prstDash val="solid"/>
+                      <a:round/>
+                      <a:headEnd type="none" w="med" len="med"/>
+                      <a:tailEnd type="none" w="med" len="med"/>
+                    </a:lnR>
+                    <a:lnT w="4763" cap="flat" cmpd="sng" algn="ctr">
+                      <a:solidFill>
+                        <a:srgbClr val="CCCCCC"/>
+                      </a:solidFill>
+                      <a:prstDash val="solid"/>
+                      <a:round/>
+                      <a:headEnd type="none" w="med" len="med"/>
+                      <a:tailEnd type="none" w="med" len="med"/>
+                    </a:lnT>
+                    <a:lnB w="4763" cap="flat" cmpd="sng" algn="ctr">
+                      <a:solidFill>
+                        <a:srgbClr val="CCCCCC"/>
+                      </a:solidFill>
+                      <a:prstDash val="solid"/>
+                      <a:round/>
+                      <a:headEnd type="none" w="med" len="med"/>
+                      <a:tailEnd type="none" w="med" len="med"/>
+                    </a:lnB>
+                  </a:tcPr>
+                </a:tc>
+                <a:extLst>
+                  <a:ext uri="{0D108BD9-81ED-4DB2-BD59-A6C34878D82A}">
+                    <a16:rowId xmlns:a16="http://schemas.microsoft.com/office/drawing/2014/main" val="357853072"/>
+                  </a:ext>
+                </a:extLst>
+              </a:tr>
+            </a:tbl>
+          </a:graphicData>
+        </a:graphic>
+      </p:graphicFrame>
     </p:spTree>
     <p:extLst>
       <p:ext uri="{BB962C8B-B14F-4D97-AF65-F5344CB8AC3E}">
-        <p14:creationId xmlns:p14="http://schemas.microsoft.com/office/powerpoint/2010/main" val="3165429123"/>
+        <p14:creationId xmlns:p14="http://schemas.microsoft.com/office/powerpoint/2010/main" val="1204619116"/>
       </p:ext>
     </p:extLst>
   </p:cSld>
@@ -4177,38 +6955,34 @@
           <a:chExt cx="0" cy="0"/>
         </a:xfrm>
       </p:grpSpPr>
-      <p:sp>
-        <p:nvSpPr>
-          <p:cNvPr id="2" name="标题 1"/>
-          <p:cNvSpPr>
-            <a:spLocks noGrp="1"/>
-          </p:cNvSpPr>
-          <p:nvPr>
-            <p:ph type="title"/>
-          </p:nvPr>
-        </p:nvSpPr>
+      <p:pic>
+        <p:nvPicPr>
+          <p:cNvPr id="4" name="图片 3"/>
+          <p:cNvPicPr>
+            <a:picLocks noChangeAspect="1"/>
+          </p:cNvPicPr>
+          <p:nvPr/>
+        </p:nvPicPr>
+        <p:blipFill>
+          <a:blip r:embed="rId2"/>
+          <a:stretch>
+            <a:fillRect/>
+          </a:stretch>
+        </p:blipFill>
         <p:spPr>
           <a:xfrm>
-            <a:off x="0" y="0"/>
-            <a:ext cx="5290457" cy="892629"/>
+            <a:off x="295794" y="1077685"/>
+            <a:ext cx="10520138" cy="3494985"/>
           </a:xfrm>
+          <a:prstGeom prst="rect">
+            <a:avLst/>
+          </a:prstGeom>
         </p:spPr>
-        <p:txBody>
-          <a:bodyPr/>
-          <a:lstStyle/>
-          <a:p>
-            <a:r>
-              <a:rPr lang="en-US" altLang="zh-CN" dirty="0" smtClean="0"/>
-              <a:t>XXX</a:t>
-            </a:r>
-            <a:endParaRPr lang="zh-CN" altLang="en-US" dirty="0"/>
-          </a:p>
-        </p:txBody>
-      </p:sp>
+      </p:pic>
     </p:spTree>
     <p:extLst>
       <p:ext uri="{BB962C8B-B14F-4D97-AF65-F5344CB8AC3E}">
-        <p14:creationId xmlns:p14="http://schemas.microsoft.com/office/powerpoint/2010/main" val="3832322732"/>
+        <p14:creationId xmlns:p14="http://schemas.microsoft.com/office/powerpoint/2010/main" val="115659390"/>
       </p:ext>
     </p:extLst>
   </p:cSld>
@@ -4245,7 +7019,12 @@
             <p:ph type="title"/>
           </p:nvPr>
         </p:nvSpPr>
-        <p:spPr/>
+        <p:spPr>
+          <a:xfrm>
+            <a:off x="0" y="0"/>
+            <a:ext cx="10515600" cy="1325563"/>
+          </a:xfrm>
+        </p:spPr>
         <p:txBody>
           <a:bodyPr/>
           <a:lstStyle/>
@@ -4397,354 +7176,6 @@
 </p:sld>
 </file>
 
-<file path=ppt/slides/slide20.xml><?xml version="1.0" encoding="utf-8"?>
-<p:sld xmlns:a="http://schemas.openxmlformats.org/drawingml/2006/main" xmlns:r="http://schemas.openxmlformats.org/officeDocument/2006/relationships" xmlns:p="http://schemas.openxmlformats.org/presentationml/2006/main">
-  <p:cSld>
-    <p:spTree>
-      <p:nvGrpSpPr>
-        <p:cNvPr id="1" name=""/>
-        <p:cNvGrpSpPr/>
-        <p:nvPr/>
-      </p:nvGrpSpPr>
-      <p:grpSpPr>
-        <a:xfrm>
-          <a:off x="0" y="0"/>
-          <a:ext cx="0" cy="0"/>
-          <a:chOff x="0" y="0"/>
-          <a:chExt cx="0" cy="0"/>
-        </a:xfrm>
-      </p:grpSpPr>
-      <p:sp>
-        <p:nvSpPr>
-          <p:cNvPr id="2" name="标题 1"/>
-          <p:cNvSpPr>
-            <a:spLocks noGrp="1"/>
-          </p:cNvSpPr>
-          <p:nvPr>
-            <p:ph type="title"/>
-          </p:nvPr>
-        </p:nvSpPr>
-        <p:spPr>
-          <a:xfrm>
-            <a:off x="0" y="0"/>
-            <a:ext cx="5290457" cy="892629"/>
-          </a:xfrm>
-        </p:spPr>
-        <p:txBody>
-          <a:bodyPr/>
-          <a:lstStyle/>
-          <a:p>
-            <a:r>
-              <a:rPr lang="en-US" altLang="zh-CN" dirty="0" smtClean="0"/>
-              <a:t>XXX</a:t>
-            </a:r>
-            <a:endParaRPr lang="zh-CN" altLang="en-US" dirty="0"/>
-          </a:p>
-        </p:txBody>
-      </p:sp>
-    </p:spTree>
-    <p:extLst>
-      <p:ext uri="{BB962C8B-B14F-4D97-AF65-F5344CB8AC3E}">
-        <p14:creationId xmlns:p14="http://schemas.microsoft.com/office/powerpoint/2010/main" val="3852255024"/>
-      </p:ext>
-    </p:extLst>
-  </p:cSld>
-  <p:clrMapOvr>
-    <a:masterClrMapping/>
-  </p:clrMapOvr>
-</p:sld>
-</file>
-
-<file path=ppt/slides/slide21.xml><?xml version="1.0" encoding="utf-8"?>
-<p:sld xmlns:a="http://schemas.openxmlformats.org/drawingml/2006/main" xmlns:r="http://schemas.openxmlformats.org/officeDocument/2006/relationships" xmlns:p="http://schemas.openxmlformats.org/presentationml/2006/main">
-  <p:cSld>
-    <p:spTree>
-      <p:nvGrpSpPr>
-        <p:cNvPr id="1" name=""/>
-        <p:cNvGrpSpPr/>
-        <p:nvPr/>
-      </p:nvGrpSpPr>
-      <p:grpSpPr>
-        <a:xfrm>
-          <a:off x="0" y="0"/>
-          <a:ext cx="0" cy="0"/>
-          <a:chOff x="0" y="0"/>
-          <a:chExt cx="0" cy="0"/>
-        </a:xfrm>
-      </p:grpSpPr>
-      <p:sp>
-        <p:nvSpPr>
-          <p:cNvPr id="2" name="标题 1"/>
-          <p:cNvSpPr>
-            <a:spLocks noGrp="1"/>
-          </p:cNvSpPr>
-          <p:nvPr>
-            <p:ph type="title"/>
-          </p:nvPr>
-        </p:nvSpPr>
-        <p:spPr>
-          <a:xfrm>
-            <a:off x="0" y="0"/>
-            <a:ext cx="5290457" cy="892629"/>
-          </a:xfrm>
-        </p:spPr>
-        <p:txBody>
-          <a:bodyPr/>
-          <a:lstStyle/>
-          <a:p>
-            <a:r>
-              <a:rPr lang="en-US" altLang="zh-CN" dirty="0" smtClean="0"/>
-              <a:t>XXX</a:t>
-            </a:r>
-            <a:endParaRPr lang="zh-CN" altLang="en-US" dirty="0"/>
-          </a:p>
-        </p:txBody>
-      </p:sp>
-    </p:spTree>
-    <p:extLst>
-      <p:ext uri="{BB962C8B-B14F-4D97-AF65-F5344CB8AC3E}">
-        <p14:creationId xmlns:p14="http://schemas.microsoft.com/office/powerpoint/2010/main" val="1468919422"/>
-      </p:ext>
-    </p:extLst>
-  </p:cSld>
-  <p:clrMapOvr>
-    <a:masterClrMapping/>
-  </p:clrMapOvr>
-</p:sld>
-</file>
-
-<file path=ppt/slides/slide22.xml><?xml version="1.0" encoding="utf-8"?>
-<p:sld xmlns:a="http://schemas.openxmlformats.org/drawingml/2006/main" xmlns:r="http://schemas.openxmlformats.org/officeDocument/2006/relationships" xmlns:p="http://schemas.openxmlformats.org/presentationml/2006/main">
-  <p:cSld>
-    <p:spTree>
-      <p:nvGrpSpPr>
-        <p:cNvPr id="1" name=""/>
-        <p:cNvGrpSpPr/>
-        <p:nvPr/>
-      </p:nvGrpSpPr>
-      <p:grpSpPr>
-        <a:xfrm>
-          <a:off x="0" y="0"/>
-          <a:ext cx="0" cy="0"/>
-          <a:chOff x="0" y="0"/>
-          <a:chExt cx="0" cy="0"/>
-        </a:xfrm>
-      </p:grpSpPr>
-      <p:sp>
-        <p:nvSpPr>
-          <p:cNvPr id="2" name="标题 1"/>
-          <p:cNvSpPr>
-            <a:spLocks noGrp="1"/>
-          </p:cNvSpPr>
-          <p:nvPr>
-            <p:ph type="title"/>
-          </p:nvPr>
-        </p:nvSpPr>
-        <p:spPr>
-          <a:xfrm>
-            <a:off x="0" y="0"/>
-            <a:ext cx="5290457" cy="892629"/>
-          </a:xfrm>
-        </p:spPr>
-        <p:txBody>
-          <a:bodyPr/>
-          <a:lstStyle/>
-          <a:p>
-            <a:r>
-              <a:rPr lang="en-US" altLang="zh-CN" dirty="0" smtClean="0"/>
-              <a:t>XXX</a:t>
-            </a:r>
-            <a:endParaRPr lang="zh-CN" altLang="en-US" dirty="0"/>
-          </a:p>
-        </p:txBody>
-      </p:sp>
-    </p:spTree>
-    <p:extLst>
-      <p:ext uri="{BB962C8B-B14F-4D97-AF65-F5344CB8AC3E}">
-        <p14:creationId xmlns:p14="http://schemas.microsoft.com/office/powerpoint/2010/main" val="2400670393"/>
-      </p:ext>
-    </p:extLst>
-  </p:cSld>
-  <p:clrMapOvr>
-    <a:masterClrMapping/>
-  </p:clrMapOvr>
-</p:sld>
-</file>
-
-<file path=ppt/slides/slide23.xml><?xml version="1.0" encoding="utf-8"?>
-<p:sld xmlns:a="http://schemas.openxmlformats.org/drawingml/2006/main" xmlns:r="http://schemas.openxmlformats.org/officeDocument/2006/relationships" xmlns:p="http://schemas.openxmlformats.org/presentationml/2006/main">
-  <p:cSld>
-    <p:spTree>
-      <p:nvGrpSpPr>
-        <p:cNvPr id="1" name=""/>
-        <p:cNvGrpSpPr/>
-        <p:nvPr/>
-      </p:nvGrpSpPr>
-      <p:grpSpPr>
-        <a:xfrm>
-          <a:off x="0" y="0"/>
-          <a:ext cx="0" cy="0"/>
-          <a:chOff x="0" y="0"/>
-          <a:chExt cx="0" cy="0"/>
-        </a:xfrm>
-      </p:grpSpPr>
-      <p:sp>
-        <p:nvSpPr>
-          <p:cNvPr id="2" name="标题 1"/>
-          <p:cNvSpPr>
-            <a:spLocks noGrp="1"/>
-          </p:cNvSpPr>
-          <p:nvPr>
-            <p:ph type="title"/>
-          </p:nvPr>
-        </p:nvSpPr>
-        <p:spPr>
-          <a:xfrm>
-            <a:off x="0" y="0"/>
-            <a:ext cx="5290457" cy="892629"/>
-          </a:xfrm>
-        </p:spPr>
-        <p:txBody>
-          <a:bodyPr/>
-          <a:lstStyle/>
-          <a:p>
-            <a:r>
-              <a:rPr lang="en-US" altLang="zh-CN" dirty="0" smtClean="0"/>
-              <a:t>XXX</a:t>
-            </a:r>
-            <a:endParaRPr lang="zh-CN" altLang="en-US" dirty="0"/>
-          </a:p>
-        </p:txBody>
-      </p:sp>
-    </p:spTree>
-    <p:extLst>
-      <p:ext uri="{BB962C8B-B14F-4D97-AF65-F5344CB8AC3E}">
-        <p14:creationId xmlns:p14="http://schemas.microsoft.com/office/powerpoint/2010/main" val="2486632522"/>
-      </p:ext>
-    </p:extLst>
-  </p:cSld>
-  <p:clrMapOvr>
-    <a:masterClrMapping/>
-  </p:clrMapOvr>
-</p:sld>
-</file>
-
-<file path=ppt/slides/slide24.xml><?xml version="1.0" encoding="utf-8"?>
-<p:sld xmlns:a="http://schemas.openxmlformats.org/drawingml/2006/main" xmlns:r="http://schemas.openxmlformats.org/officeDocument/2006/relationships" xmlns:p="http://schemas.openxmlformats.org/presentationml/2006/main">
-  <p:cSld>
-    <p:spTree>
-      <p:nvGrpSpPr>
-        <p:cNvPr id="1" name=""/>
-        <p:cNvGrpSpPr/>
-        <p:nvPr/>
-      </p:nvGrpSpPr>
-      <p:grpSpPr>
-        <a:xfrm>
-          <a:off x="0" y="0"/>
-          <a:ext cx="0" cy="0"/>
-          <a:chOff x="0" y="0"/>
-          <a:chExt cx="0" cy="0"/>
-        </a:xfrm>
-      </p:grpSpPr>
-      <p:sp>
-        <p:nvSpPr>
-          <p:cNvPr id="2" name="标题 1"/>
-          <p:cNvSpPr>
-            <a:spLocks noGrp="1"/>
-          </p:cNvSpPr>
-          <p:nvPr>
-            <p:ph type="title"/>
-          </p:nvPr>
-        </p:nvSpPr>
-        <p:spPr>
-          <a:xfrm>
-            <a:off x="0" y="0"/>
-            <a:ext cx="5290457" cy="892629"/>
-          </a:xfrm>
-        </p:spPr>
-        <p:txBody>
-          <a:bodyPr/>
-          <a:lstStyle/>
-          <a:p>
-            <a:r>
-              <a:rPr lang="en-US" altLang="zh-CN" dirty="0" smtClean="0"/>
-              <a:t>XXX</a:t>
-            </a:r>
-            <a:endParaRPr lang="zh-CN" altLang="en-US" dirty="0"/>
-          </a:p>
-        </p:txBody>
-      </p:sp>
-    </p:spTree>
-    <p:extLst>
-      <p:ext uri="{BB962C8B-B14F-4D97-AF65-F5344CB8AC3E}">
-        <p14:creationId xmlns:p14="http://schemas.microsoft.com/office/powerpoint/2010/main" val="2996630039"/>
-      </p:ext>
-    </p:extLst>
-  </p:cSld>
-  <p:clrMapOvr>
-    <a:masterClrMapping/>
-  </p:clrMapOvr>
-</p:sld>
-</file>
-
-<file path=ppt/slides/slide25.xml><?xml version="1.0" encoding="utf-8"?>
-<p:sld xmlns:a="http://schemas.openxmlformats.org/drawingml/2006/main" xmlns:r="http://schemas.openxmlformats.org/officeDocument/2006/relationships" xmlns:p="http://schemas.openxmlformats.org/presentationml/2006/main">
-  <p:cSld>
-    <p:spTree>
-      <p:nvGrpSpPr>
-        <p:cNvPr id="1" name=""/>
-        <p:cNvGrpSpPr/>
-        <p:nvPr/>
-      </p:nvGrpSpPr>
-      <p:grpSpPr>
-        <a:xfrm>
-          <a:off x="0" y="0"/>
-          <a:ext cx="0" cy="0"/>
-          <a:chOff x="0" y="0"/>
-          <a:chExt cx="0" cy="0"/>
-        </a:xfrm>
-      </p:grpSpPr>
-      <p:sp>
-        <p:nvSpPr>
-          <p:cNvPr id="2" name="标题 1"/>
-          <p:cNvSpPr>
-            <a:spLocks noGrp="1"/>
-          </p:cNvSpPr>
-          <p:nvPr>
-            <p:ph type="title"/>
-          </p:nvPr>
-        </p:nvSpPr>
-        <p:spPr>
-          <a:xfrm>
-            <a:off x="0" y="0"/>
-            <a:ext cx="5290457" cy="892629"/>
-          </a:xfrm>
-        </p:spPr>
-        <p:txBody>
-          <a:bodyPr/>
-          <a:lstStyle/>
-          <a:p>
-            <a:r>
-              <a:rPr lang="en-US" altLang="zh-CN" dirty="0" smtClean="0"/>
-              <a:t>XXX</a:t>
-            </a:r>
-            <a:endParaRPr lang="zh-CN" altLang="en-US" dirty="0"/>
-          </a:p>
-        </p:txBody>
-      </p:sp>
-    </p:spTree>
-    <p:extLst>
-      <p:ext uri="{BB962C8B-B14F-4D97-AF65-F5344CB8AC3E}">
-        <p14:creationId xmlns:p14="http://schemas.microsoft.com/office/powerpoint/2010/main" val="2820577833"/>
-      </p:ext>
-    </p:extLst>
-  </p:cSld>
-  <p:clrMapOvr>
-    <a:masterClrMapping/>
-  </p:clrMapOvr>
-</p:sld>
-</file>
-
 <file path=ppt/slides/slide3.xml><?xml version="1.0" encoding="utf-8"?>
 <p:sld xmlns:a="http://schemas.openxmlformats.org/drawingml/2006/main" xmlns:r="http://schemas.openxmlformats.org/officeDocument/2006/relationships" xmlns:p="http://schemas.openxmlformats.org/presentationml/2006/main">
   <p:cSld>
@@ -4854,8 +7285,8 @@
         </p:blipFill>
         <p:spPr>
           <a:xfrm>
-            <a:off x="3180362" y="2819643"/>
-            <a:ext cx="5961905" cy="3885714"/>
+            <a:off x="3224893" y="3084831"/>
+            <a:ext cx="4477738" cy="2918398"/>
           </a:xfrm>
           <a:prstGeom prst="rect">
             <a:avLst/>
@@ -4944,8 +7375,8 @@
         </p:blipFill>
         <p:spPr>
           <a:xfrm>
-            <a:off x="116331" y="819852"/>
-            <a:ext cx="10761905" cy="2152381"/>
+            <a:off x="197974" y="1048452"/>
+            <a:ext cx="6845083" cy="1369017"/>
           </a:xfrm>
           <a:prstGeom prst="rect">
             <a:avLst/>
@@ -4968,7 +7399,7 @@
         </p:blipFill>
         <p:spPr>
           <a:xfrm>
-            <a:off x="479510" y="3125065"/>
+            <a:off x="197974" y="2624321"/>
             <a:ext cx="5605604" cy="3732935"/>
           </a:xfrm>
           <a:prstGeom prst="rect">
@@ -5038,7 +7469,7 @@
         </p:blipFill>
         <p:spPr>
           <a:xfrm>
-            <a:off x="6324599" y="6210368"/>
+            <a:off x="6139542" y="5732982"/>
             <a:ext cx="5005543" cy="624274"/>
           </a:xfrm>
           <a:prstGeom prst="rect">
@@ -5360,6 +7791,68 @@
 </file>
 
 <file path=ppt/slides/slide7.xml><?xml version="1.0" encoding="utf-8"?>
+<p:sld xmlns:a="http://schemas.openxmlformats.org/drawingml/2006/main" xmlns:r="http://schemas.openxmlformats.org/officeDocument/2006/relationships" xmlns:p="http://schemas.openxmlformats.org/presentationml/2006/main">
+  <p:cSld>
+    <p:spTree>
+      <p:nvGrpSpPr>
+        <p:cNvPr id="1" name=""/>
+        <p:cNvGrpSpPr/>
+        <p:nvPr/>
+      </p:nvGrpSpPr>
+      <p:grpSpPr>
+        <a:xfrm>
+          <a:off x="0" y="0"/>
+          <a:ext cx="0" cy="0"/>
+          <a:chOff x="0" y="0"/>
+          <a:chExt cx="0" cy="0"/>
+        </a:xfrm>
+      </p:grpSpPr>
+      <p:sp>
+        <p:nvSpPr>
+          <p:cNvPr id="2" name="标题 1"/>
+          <p:cNvSpPr>
+            <a:spLocks noGrp="1"/>
+          </p:cNvSpPr>
+          <p:nvPr>
+            <p:ph type="title"/>
+          </p:nvPr>
+        </p:nvSpPr>
+        <p:spPr>
+          <a:xfrm>
+            <a:off x="2600780" y="1089253"/>
+            <a:ext cx="6679292" cy="2852737"/>
+          </a:xfrm>
+        </p:spPr>
+        <p:txBody>
+          <a:bodyPr/>
+          <a:lstStyle/>
+          <a:p>
+            <a:r>
+              <a:rPr lang="zh-TW" altLang="en-US" dirty="0" smtClean="0"/>
+              <a:t>代码上传到</a:t>
+            </a:r>
+            <a:r>
+              <a:rPr lang="en-US" altLang="zh-TW" dirty="0" err="1" smtClean="0"/>
+              <a:t>github</a:t>
+            </a:r>
+            <a:endParaRPr lang="zh-CN" altLang="en-US" dirty="0"/>
+          </a:p>
+        </p:txBody>
+      </p:sp>
+    </p:spTree>
+    <p:extLst>
+      <p:ext uri="{BB962C8B-B14F-4D97-AF65-F5344CB8AC3E}">
+        <p14:creationId xmlns:p14="http://schemas.microsoft.com/office/powerpoint/2010/main" val="2250269088"/>
+      </p:ext>
+    </p:extLst>
+  </p:cSld>
+  <p:clrMapOvr>
+    <a:masterClrMapping/>
+  </p:clrMapOvr>
+</p:sld>
+</file>
+
+<file path=ppt/slides/slide8.xml><?xml version="1.0" encoding="utf-8"?>
 <p:sld xmlns:a="http://schemas.openxmlformats.org/drawingml/2006/main" xmlns:r="http://schemas.openxmlformats.org/officeDocument/2006/relationships" xmlns:p="http://schemas.openxmlformats.org/presentationml/2006/main">
   <p:cSld>
     <p:spTree>
@@ -5551,7 +8044,7 @@
 </p:sld>
 </file>
 
-<file path=ppt/slides/slide8.xml><?xml version="1.0" encoding="utf-8"?>
+<file path=ppt/slides/slide9.xml><?xml version="1.0" encoding="utf-8"?>
 <p:sld xmlns:a="http://schemas.openxmlformats.org/drawingml/2006/main" xmlns:r="http://schemas.openxmlformats.org/officeDocument/2006/relationships" xmlns:p="http://schemas.openxmlformats.org/presentationml/2006/main">
   <p:cSld>
     <p:spTree>
@@ -5652,208 +8145,6 @@
     <p:extLst>
       <p:ext uri="{BB962C8B-B14F-4D97-AF65-F5344CB8AC3E}">
         <p14:creationId xmlns:p14="http://schemas.microsoft.com/office/powerpoint/2010/main" val="3173408615"/>
-      </p:ext>
-    </p:extLst>
-  </p:cSld>
-  <p:clrMapOvr>
-    <a:masterClrMapping/>
-  </p:clrMapOvr>
-</p:sld>
-</file>
-
-<file path=ppt/slides/slide9.xml><?xml version="1.0" encoding="utf-8"?>
-<p:sld xmlns:a="http://schemas.openxmlformats.org/drawingml/2006/main" xmlns:r="http://schemas.openxmlformats.org/officeDocument/2006/relationships" xmlns:p="http://schemas.openxmlformats.org/presentationml/2006/main">
-  <p:cSld>
-    <p:spTree>
-      <p:nvGrpSpPr>
-        <p:cNvPr id="1" name=""/>
-        <p:cNvGrpSpPr/>
-        <p:nvPr/>
-      </p:nvGrpSpPr>
-      <p:grpSpPr>
-        <a:xfrm>
-          <a:off x="0" y="0"/>
-          <a:ext cx="0" cy="0"/>
-          <a:chOff x="0" y="0"/>
-          <a:chExt cx="0" cy="0"/>
-        </a:xfrm>
-      </p:grpSpPr>
-      <p:sp>
-        <p:nvSpPr>
-          <p:cNvPr id="2" name="标题 1"/>
-          <p:cNvSpPr>
-            <a:spLocks noGrp="1"/>
-          </p:cNvSpPr>
-          <p:nvPr>
-            <p:ph type="title"/>
-          </p:nvPr>
-        </p:nvSpPr>
-        <p:spPr>
-          <a:xfrm>
-            <a:off x="0" y="0"/>
-            <a:ext cx="5290457" cy="892629"/>
-          </a:xfrm>
-        </p:spPr>
-        <p:txBody>
-          <a:bodyPr/>
-          <a:lstStyle/>
-          <a:p>
-            <a:r>
-              <a:rPr lang="zh-CN" altLang="en-US" dirty="0"/>
-              <a:t>代码上传到</a:t>
-            </a:r>
-            <a:r>
-              <a:rPr lang="en-US" altLang="zh-CN" dirty="0" err="1"/>
-              <a:t>github</a:t>
-            </a:r>
-            <a:endParaRPr lang="zh-CN" altLang="en-US" dirty="0"/>
-          </a:p>
-        </p:txBody>
-      </p:sp>
-      <p:pic>
-        <p:nvPicPr>
-          <p:cNvPr id="3" name="图片 2"/>
-          <p:cNvPicPr>
-            <a:picLocks noChangeAspect="1"/>
-          </p:cNvPicPr>
-          <p:nvPr/>
-        </p:nvPicPr>
-        <p:blipFill>
-          <a:blip r:embed="rId2"/>
-          <a:stretch>
-            <a:fillRect/>
-          </a:stretch>
-        </p:blipFill>
-        <p:spPr>
-          <a:xfrm>
-            <a:off x="0" y="957942"/>
-            <a:ext cx="5586934" cy="3799115"/>
-          </a:xfrm>
-          <a:prstGeom prst="rect">
-            <a:avLst/>
-          </a:prstGeom>
-        </p:spPr>
-      </p:pic>
-      <p:pic>
-        <p:nvPicPr>
-          <p:cNvPr id="4" name="图片 3"/>
-          <p:cNvPicPr>
-            <a:picLocks noChangeAspect="1"/>
-          </p:cNvPicPr>
-          <p:nvPr/>
-        </p:nvPicPr>
-        <p:blipFill>
-          <a:blip r:embed="rId3"/>
-          <a:stretch>
-            <a:fillRect/>
-          </a:stretch>
-        </p:blipFill>
-        <p:spPr>
-          <a:xfrm>
-            <a:off x="4880800" y="2661557"/>
-            <a:ext cx="7178685" cy="4053271"/>
-          </a:xfrm>
-          <a:prstGeom prst="rect">
-            <a:avLst/>
-          </a:prstGeom>
-        </p:spPr>
-      </p:pic>
-      <p:sp>
-        <p:nvSpPr>
-          <p:cNvPr id="5" name="圆角矩形 4"/>
-          <p:cNvSpPr/>
-          <p:nvPr/>
-        </p:nvSpPr>
-        <p:spPr>
-          <a:xfrm>
-            <a:off x="6389914" y="375557"/>
-            <a:ext cx="4561115" cy="2122714"/>
-          </a:xfrm>
-          <a:prstGeom prst="roundRect">
-            <a:avLst/>
-          </a:prstGeom>
-        </p:spPr>
-        <p:style>
-          <a:lnRef idx="2">
-            <a:schemeClr val="accent2">
-              <a:shade val="50000"/>
-            </a:schemeClr>
-          </a:lnRef>
-          <a:fillRef idx="1">
-            <a:schemeClr val="accent2"/>
-          </a:fillRef>
-          <a:effectRef idx="0">
-            <a:schemeClr val="accent2"/>
-          </a:effectRef>
-          <a:fontRef idx="minor">
-            <a:schemeClr val="lt1"/>
-          </a:fontRef>
-        </p:style>
-        <p:txBody>
-          <a:bodyPr rtlCol="0" anchor="ctr"/>
-          <a:lstStyle/>
-          <a:p>
-            <a:pPr algn="ctr"/>
-            <a:r>
-              <a:rPr lang="en-US" altLang="zh-TW" dirty="0" err="1" smtClean="0"/>
-              <a:t>Vpn</a:t>
-            </a:r>
-            <a:r>
-              <a:rPr lang="zh-TW" altLang="en-US" dirty="0" smtClean="0"/>
-              <a:t>＋</a:t>
-            </a:r>
-            <a:r>
-              <a:rPr lang="en-US" altLang="zh-TW" dirty="0" err="1" smtClean="0"/>
-              <a:t>deepseek</a:t>
-            </a:r>
-            <a:r>
-              <a:rPr lang="zh-TW" altLang="en-US" dirty="0" smtClean="0"/>
-              <a:t>结果失败，说是</a:t>
-            </a:r>
-            <a:r>
-              <a:rPr lang="en-US" altLang="zh-TW" dirty="0" err="1" smtClean="0"/>
-              <a:t>deepseek</a:t>
-            </a:r>
-            <a:r>
-              <a:rPr lang="zh-TW" altLang="en-US" dirty="0" smtClean="0"/>
-              <a:t>不支持。</a:t>
-            </a:r>
-            <a:endParaRPr lang="en-US" altLang="zh-TW" dirty="0" smtClean="0"/>
-          </a:p>
-          <a:p>
-            <a:pPr algn="ctr"/>
-            <a:r>
-              <a:rPr lang="zh-TW" altLang="en-US" dirty="0"/>
-              <a:t>改</a:t>
-            </a:r>
-            <a:r>
-              <a:rPr lang="zh-TW" altLang="en-US" dirty="0" smtClean="0"/>
-              <a:t>成</a:t>
-            </a:r>
-            <a:r>
-              <a:rPr lang="en-US" altLang="zh-TW" dirty="0" smtClean="0"/>
-              <a:t>sam_auto_5G+</a:t>
-            </a:r>
-            <a:r>
-              <a:rPr lang="zh-TW" altLang="en-US" dirty="0" smtClean="0"/>
-              <a:t>中继</a:t>
-            </a:r>
-            <a:r>
-              <a:rPr lang="en-US" altLang="zh-TW" dirty="0" smtClean="0"/>
-              <a:t>model</a:t>
-            </a:r>
-            <a:r>
-              <a:rPr lang="zh-TW" altLang="en-US" dirty="0" smtClean="0"/>
-              <a:t>成功！！</a:t>
-            </a:r>
-            <a:endParaRPr lang="zh-CN" altLang="en-US" dirty="0"/>
-          </a:p>
-        </p:txBody>
-      </p:sp>
-    </p:spTree>
-    <p:extLst>
-      <p:ext uri="{BB962C8B-B14F-4D97-AF65-F5344CB8AC3E}">
-        <p14:creationId xmlns:p14="http://schemas.microsoft.com/office/powerpoint/2010/main" val="2654713184"/>
       </p:ext>
     </p:extLst>
   </p:cSld>
